--- a/GameOfLife.pptx
+++ b/GameOfLife.pptx
@@ -5,7 +5,7 @@
     <p:sldMasterId id="2147483648" r:id="rId1"/>
   </p:sldMasterIdLst>
   <p:notesMasterIdLst>
-    <p:notesMasterId r:id="rId10"/>
+    <p:notesMasterId r:id="rId13"/>
   </p:notesMasterIdLst>
   <p:sldIdLst>
     <p:sldId id="256" r:id="rId2"/>
@@ -16,6 +16,9 @@
     <p:sldId id="262" r:id="rId7"/>
     <p:sldId id="264" r:id="rId8"/>
     <p:sldId id="263" r:id="rId9"/>
+    <p:sldId id="265" r:id="rId10"/>
+    <p:sldId id="266" r:id="rId11"/>
+    <p:sldId id="267" r:id="rId12"/>
   </p:sldIdLst>
   <p:sldSz cx="9144000" cy="6858000" type="screen4x3"/>
   <p:notesSz cx="6858000" cy="9144000"/>
@@ -166,7 +169,7 @@
             </a:lvl1pPr>
           </a:lstStyle>
           <a:p>
-            <a:endParaRPr lang="ru-RU"/>
+            <a:endParaRPr lang="ru-RU" dirty="0"/>
           </a:p>
         </p:txBody>
       </p:sp>
@@ -199,9 +202,9 @@
           <a:p>
             <a:fld id="{D5701980-7080-45E9-A76B-DF6F4B04EE3C}" type="datetimeFigureOut">
               <a:rPr lang="ru-RU" smtClean="0"/>
-              <a:t>12.05.2026</a:t>
+              <a:t>17.05.2026</a:t>
             </a:fld>
-            <a:endParaRPr lang="ru-RU"/>
+            <a:endParaRPr lang="ru-RU" dirty="0"/>
           </a:p>
         </p:txBody>
       </p:sp>
@@ -234,7 +237,7 @@
           <a:bodyPr vert="horz" lIns="91440" tIns="45720" rIns="91440" bIns="45720" rtlCol="0" anchor="ctr"/>
           <a:lstStyle/>
           <a:p>
-            <a:endParaRPr lang="ru-RU"/>
+            <a:endParaRPr lang="ru-RU" dirty="0"/>
           </a:p>
         </p:txBody>
       </p:sp>
@@ -325,7 +328,7 @@
             </a:lvl1pPr>
           </a:lstStyle>
           <a:p>
-            <a:endParaRPr lang="ru-RU"/>
+            <a:endParaRPr lang="ru-RU" dirty="0"/>
           </a:p>
         </p:txBody>
       </p:sp>
@@ -360,7 +363,7 @@
               <a:rPr lang="ru-RU" smtClean="0"/>
               <a:t>‹#›</a:t>
             </a:fld>
-            <a:endParaRPr lang="ru-RU"/>
+            <a:endParaRPr lang="ru-RU" dirty="0"/>
           </a:p>
         </p:txBody>
       </p:sp>
@@ -534,7 +537,7 @@
               <a:rPr lang="ru-RU" smtClean="0"/>
               <a:t>2</a:t>
             </a:fld>
-            <a:endParaRPr lang="ru-RU"/>
+            <a:endParaRPr lang="ru-RU" dirty="0"/>
           </a:p>
         </p:txBody>
       </p:sp>
@@ -618,7 +621,7 @@
               <a:rPr lang="ru-RU" smtClean="0"/>
               <a:t>4</a:t>
             </a:fld>
-            <a:endParaRPr lang="ru-RU"/>
+            <a:endParaRPr lang="ru-RU" dirty="0"/>
           </a:p>
         </p:txBody>
       </p:sp>
@@ -702,7 +705,7 @@
               <a:rPr lang="ru-RU" smtClean="0"/>
               <a:t>5</a:t>
             </a:fld>
-            <a:endParaRPr lang="ru-RU"/>
+            <a:endParaRPr lang="ru-RU" dirty="0"/>
           </a:p>
         </p:txBody>
       </p:sp>
@@ -786,7 +789,7 @@
               <a:rPr lang="ru-RU" smtClean="0"/>
               <a:t>6</a:t>
             </a:fld>
-            <a:endParaRPr lang="ru-RU"/>
+            <a:endParaRPr lang="ru-RU" dirty="0"/>
           </a:p>
         </p:txBody>
       </p:sp>
@@ -847,6 +850,14 @@
           <a:bodyPr/>
           <a:lstStyle/>
           <a:p>
+            <a:r>
+              <a:rPr lang="ru-RU" dirty="0" smtClean="0"/>
+              <a:t>Картинку заменить позже</a:t>
+            </a:r>
+            <a:r>
+              <a:rPr lang="ru-RU" baseline="0" dirty="0" smtClean="0"/>
+              <a:t> после добавления новых пресетов + кнопки некоторые назвать бы по другому</a:t>
+            </a:r>
             <a:endParaRPr lang="ru-RU" dirty="0"/>
           </a:p>
         </p:txBody>
@@ -870,7 +881,7 @@
               <a:rPr lang="ru-RU" smtClean="0"/>
               <a:t>7</a:t>
             </a:fld>
-            <a:endParaRPr lang="ru-RU"/>
+            <a:endParaRPr lang="ru-RU" dirty="0"/>
           </a:p>
         </p:txBody>
       </p:sp>
@@ -954,7 +965,267 @@
               <a:rPr lang="ru-RU" smtClean="0"/>
               <a:t>8</a:t>
             </a:fld>
-            <a:endParaRPr lang="ru-RU"/>
+            <a:endParaRPr lang="ru-RU" dirty="0"/>
+          </a:p>
+        </p:txBody>
+      </p:sp>
+    </p:spTree>
+    <p:extLst>
+      <p:ext uri="{BB962C8B-B14F-4D97-AF65-F5344CB8AC3E}">
+        <p14:creationId xmlns:p14="http://schemas.microsoft.com/office/powerpoint/2010/main" val="2202860516"/>
+      </p:ext>
+    </p:extLst>
+  </p:cSld>
+  <p:clrMapOvr>
+    <a:masterClrMapping/>
+  </p:clrMapOvr>
+</p:notes>
+</file>
+
+<file path=ppt/notesSlides/notesSlide7.xml><?xml version="1.0" encoding="utf-8"?>
+<p:notes xmlns:a="http://schemas.openxmlformats.org/drawingml/2006/main" xmlns:r="http://schemas.openxmlformats.org/officeDocument/2006/relationships" xmlns:p="http://schemas.openxmlformats.org/presentationml/2006/main">
+  <p:cSld>
+    <p:spTree>
+      <p:nvGrpSpPr>
+        <p:cNvPr id="1" name=""/>
+        <p:cNvGrpSpPr/>
+        <p:nvPr/>
+      </p:nvGrpSpPr>
+      <p:grpSpPr>
+        <a:xfrm>
+          <a:off x="0" y="0"/>
+          <a:ext cx="0" cy="0"/>
+          <a:chOff x="0" y="0"/>
+          <a:chExt cx="0" cy="0"/>
+        </a:xfrm>
+      </p:grpSpPr>
+      <p:sp>
+        <p:nvSpPr>
+          <p:cNvPr id="2" name="Образ слайда 1"/>
+          <p:cNvSpPr>
+            <a:spLocks noGrp="1" noRot="1" noChangeAspect="1"/>
+          </p:cNvSpPr>
+          <p:nvPr>
+            <p:ph type="sldImg"/>
+          </p:nvPr>
+        </p:nvSpPr>
+        <p:spPr/>
+      </p:sp>
+      <p:sp>
+        <p:nvSpPr>
+          <p:cNvPr id="3" name="Заметки 2"/>
+          <p:cNvSpPr>
+            <a:spLocks noGrp="1"/>
+          </p:cNvSpPr>
+          <p:nvPr>
+            <p:ph type="body" idx="1"/>
+          </p:nvPr>
+        </p:nvSpPr>
+        <p:spPr/>
+        <p:txBody>
+          <a:bodyPr/>
+          <a:lstStyle/>
+          <a:p>
+            <a:endParaRPr lang="ru-RU" dirty="0"/>
+          </a:p>
+        </p:txBody>
+      </p:sp>
+      <p:sp>
+        <p:nvSpPr>
+          <p:cNvPr id="4" name="Номер слайда 3"/>
+          <p:cNvSpPr>
+            <a:spLocks noGrp="1"/>
+          </p:cNvSpPr>
+          <p:nvPr>
+            <p:ph type="sldNum" sz="quarter" idx="10"/>
+          </p:nvPr>
+        </p:nvSpPr>
+        <p:spPr/>
+        <p:txBody>
+          <a:bodyPr/>
+          <a:lstStyle/>
+          <a:p>
+            <a:fld id="{1D31422F-FEB0-4D43-BFB8-D9CE0D2A3C18}" type="slidenum">
+              <a:rPr lang="ru-RU" smtClean="0"/>
+              <a:t>9</a:t>
+            </a:fld>
+            <a:endParaRPr lang="ru-RU" dirty="0"/>
+          </a:p>
+        </p:txBody>
+      </p:sp>
+    </p:spTree>
+    <p:extLst>
+      <p:ext uri="{BB962C8B-B14F-4D97-AF65-F5344CB8AC3E}">
+        <p14:creationId xmlns:p14="http://schemas.microsoft.com/office/powerpoint/2010/main" val="2202860516"/>
+      </p:ext>
+    </p:extLst>
+  </p:cSld>
+  <p:clrMapOvr>
+    <a:masterClrMapping/>
+  </p:clrMapOvr>
+</p:notes>
+</file>
+
+<file path=ppt/notesSlides/notesSlide8.xml><?xml version="1.0" encoding="utf-8"?>
+<p:notes xmlns:a="http://schemas.openxmlformats.org/drawingml/2006/main" xmlns:r="http://schemas.openxmlformats.org/officeDocument/2006/relationships" xmlns:p="http://schemas.openxmlformats.org/presentationml/2006/main">
+  <p:cSld>
+    <p:spTree>
+      <p:nvGrpSpPr>
+        <p:cNvPr id="1" name=""/>
+        <p:cNvGrpSpPr/>
+        <p:nvPr/>
+      </p:nvGrpSpPr>
+      <p:grpSpPr>
+        <a:xfrm>
+          <a:off x="0" y="0"/>
+          <a:ext cx="0" cy="0"/>
+          <a:chOff x="0" y="0"/>
+          <a:chExt cx="0" cy="0"/>
+        </a:xfrm>
+      </p:grpSpPr>
+      <p:sp>
+        <p:nvSpPr>
+          <p:cNvPr id="2" name="Образ слайда 1"/>
+          <p:cNvSpPr>
+            <a:spLocks noGrp="1" noRot="1" noChangeAspect="1"/>
+          </p:cNvSpPr>
+          <p:nvPr>
+            <p:ph type="sldImg"/>
+          </p:nvPr>
+        </p:nvSpPr>
+        <p:spPr/>
+      </p:sp>
+      <p:sp>
+        <p:nvSpPr>
+          <p:cNvPr id="3" name="Заметки 2"/>
+          <p:cNvSpPr>
+            <a:spLocks noGrp="1"/>
+          </p:cNvSpPr>
+          <p:nvPr>
+            <p:ph type="body" idx="1"/>
+          </p:nvPr>
+        </p:nvSpPr>
+        <p:spPr/>
+        <p:txBody>
+          <a:bodyPr/>
+          <a:lstStyle/>
+          <a:p>
+            <a:endParaRPr lang="ru-RU" dirty="0"/>
+          </a:p>
+        </p:txBody>
+      </p:sp>
+      <p:sp>
+        <p:nvSpPr>
+          <p:cNvPr id="4" name="Номер слайда 3"/>
+          <p:cNvSpPr>
+            <a:spLocks noGrp="1"/>
+          </p:cNvSpPr>
+          <p:nvPr>
+            <p:ph type="sldNum" sz="quarter" idx="10"/>
+          </p:nvPr>
+        </p:nvSpPr>
+        <p:spPr/>
+        <p:txBody>
+          <a:bodyPr/>
+          <a:lstStyle/>
+          <a:p>
+            <a:fld id="{1D31422F-FEB0-4D43-BFB8-D9CE0D2A3C18}" type="slidenum">
+              <a:rPr lang="ru-RU" smtClean="0"/>
+              <a:t>10</a:t>
+            </a:fld>
+            <a:endParaRPr lang="ru-RU" dirty="0"/>
+          </a:p>
+        </p:txBody>
+      </p:sp>
+    </p:spTree>
+    <p:extLst>
+      <p:ext uri="{BB962C8B-B14F-4D97-AF65-F5344CB8AC3E}">
+        <p14:creationId xmlns:p14="http://schemas.microsoft.com/office/powerpoint/2010/main" val="2202860516"/>
+      </p:ext>
+    </p:extLst>
+  </p:cSld>
+  <p:clrMapOvr>
+    <a:masterClrMapping/>
+  </p:clrMapOvr>
+</p:notes>
+</file>
+
+<file path=ppt/notesSlides/notesSlide9.xml><?xml version="1.0" encoding="utf-8"?>
+<p:notes xmlns:a="http://schemas.openxmlformats.org/drawingml/2006/main" xmlns:r="http://schemas.openxmlformats.org/officeDocument/2006/relationships" xmlns:p="http://schemas.openxmlformats.org/presentationml/2006/main">
+  <p:cSld>
+    <p:spTree>
+      <p:nvGrpSpPr>
+        <p:cNvPr id="1" name=""/>
+        <p:cNvGrpSpPr/>
+        <p:nvPr/>
+      </p:nvGrpSpPr>
+      <p:grpSpPr>
+        <a:xfrm>
+          <a:off x="0" y="0"/>
+          <a:ext cx="0" cy="0"/>
+          <a:chOff x="0" y="0"/>
+          <a:chExt cx="0" cy="0"/>
+        </a:xfrm>
+      </p:grpSpPr>
+      <p:sp>
+        <p:nvSpPr>
+          <p:cNvPr id="2" name="Образ слайда 1"/>
+          <p:cNvSpPr>
+            <a:spLocks noGrp="1" noRot="1" noChangeAspect="1"/>
+          </p:cNvSpPr>
+          <p:nvPr>
+            <p:ph type="sldImg"/>
+          </p:nvPr>
+        </p:nvSpPr>
+        <p:spPr/>
+      </p:sp>
+      <p:sp>
+        <p:nvSpPr>
+          <p:cNvPr id="3" name="Заметки 2"/>
+          <p:cNvSpPr>
+            <a:spLocks noGrp="1"/>
+          </p:cNvSpPr>
+          <p:nvPr>
+            <p:ph type="body" idx="1"/>
+          </p:nvPr>
+        </p:nvSpPr>
+        <p:spPr/>
+        <p:txBody>
+          <a:bodyPr/>
+          <a:lstStyle/>
+          <a:p>
+            <a:r>
+              <a:rPr lang="ru-RU" dirty="0" smtClean="0"/>
+              <a:t>Так</a:t>
+            </a:r>
+            <a:r>
+              <a:rPr lang="ru-RU" baseline="0" dirty="0" smtClean="0"/>
+              <a:t> же картинка</a:t>
+            </a:r>
+            <a:endParaRPr lang="ru-RU" dirty="0"/>
+          </a:p>
+        </p:txBody>
+      </p:sp>
+      <p:sp>
+        <p:nvSpPr>
+          <p:cNvPr id="4" name="Номер слайда 3"/>
+          <p:cNvSpPr>
+            <a:spLocks noGrp="1"/>
+          </p:cNvSpPr>
+          <p:nvPr>
+            <p:ph type="sldNum" sz="quarter" idx="10"/>
+          </p:nvPr>
+        </p:nvSpPr>
+        <p:spPr/>
+        <p:txBody>
+          <a:bodyPr/>
+          <a:lstStyle/>
+          <a:p>
+            <a:fld id="{1D31422F-FEB0-4D43-BFB8-D9CE0D2A3C18}" type="slidenum">
+              <a:rPr lang="ru-RU" smtClean="0"/>
+              <a:t>11</a:t>
+            </a:fld>
+            <a:endParaRPr lang="ru-RU" dirty="0"/>
           </a:p>
         </p:txBody>
       </p:sp>
@@ -1152,9 +1423,9 @@
           <a:p>
             <a:fld id="{FC363017-527F-4884-94E3-7C0A28AAD0EC}" type="datetimeFigureOut">
               <a:rPr lang="ru-RU" smtClean="0"/>
-              <a:t>12.05.2026</a:t>
+              <a:t>17.05.2026</a:t>
             </a:fld>
-            <a:endParaRPr lang="ru-RU"/>
+            <a:endParaRPr lang="ru-RU" dirty="0"/>
           </a:p>
         </p:txBody>
       </p:sp>
@@ -1173,7 +1444,7 @@
           <a:bodyPr/>
           <a:lstStyle/>
           <a:p>
-            <a:endParaRPr lang="ru-RU"/>
+            <a:endParaRPr lang="ru-RU" dirty="0"/>
           </a:p>
         </p:txBody>
       </p:sp>
@@ -1196,7 +1467,7 @@
               <a:rPr lang="ru-RU" smtClean="0"/>
               <a:t>‹#›</a:t>
             </a:fld>
-            <a:endParaRPr lang="ru-RU"/>
+            <a:endParaRPr lang="ru-RU" dirty="0"/>
           </a:p>
         </p:txBody>
       </p:sp>
@@ -1322,9 +1593,9 @@
           <a:p>
             <a:fld id="{FC363017-527F-4884-94E3-7C0A28AAD0EC}" type="datetimeFigureOut">
               <a:rPr lang="ru-RU" smtClean="0"/>
-              <a:t>12.05.2026</a:t>
+              <a:t>17.05.2026</a:t>
             </a:fld>
-            <a:endParaRPr lang="ru-RU"/>
+            <a:endParaRPr lang="ru-RU" dirty="0"/>
           </a:p>
         </p:txBody>
       </p:sp>
@@ -1343,7 +1614,7 @@
           <a:bodyPr/>
           <a:lstStyle/>
           <a:p>
-            <a:endParaRPr lang="ru-RU"/>
+            <a:endParaRPr lang="ru-RU" dirty="0"/>
           </a:p>
         </p:txBody>
       </p:sp>
@@ -1366,7 +1637,7 @@
               <a:rPr lang="ru-RU" smtClean="0"/>
               <a:t>‹#›</a:t>
             </a:fld>
-            <a:endParaRPr lang="ru-RU"/>
+            <a:endParaRPr lang="ru-RU" dirty="0"/>
           </a:p>
         </p:txBody>
       </p:sp>
@@ -1502,9 +1773,9 @@
           <a:p>
             <a:fld id="{FC363017-527F-4884-94E3-7C0A28AAD0EC}" type="datetimeFigureOut">
               <a:rPr lang="ru-RU" smtClean="0"/>
-              <a:t>12.05.2026</a:t>
+              <a:t>17.05.2026</a:t>
             </a:fld>
-            <a:endParaRPr lang="ru-RU"/>
+            <a:endParaRPr lang="ru-RU" dirty="0"/>
           </a:p>
         </p:txBody>
       </p:sp>
@@ -1523,7 +1794,7 @@
           <a:bodyPr/>
           <a:lstStyle/>
           <a:p>
-            <a:endParaRPr lang="ru-RU"/>
+            <a:endParaRPr lang="ru-RU" dirty="0"/>
           </a:p>
         </p:txBody>
       </p:sp>
@@ -1546,7 +1817,7 @@
               <a:rPr lang="ru-RU" smtClean="0"/>
               <a:t>‹#›</a:t>
             </a:fld>
-            <a:endParaRPr lang="ru-RU"/>
+            <a:endParaRPr lang="ru-RU" dirty="0"/>
           </a:p>
         </p:txBody>
       </p:sp>
@@ -1672,9 +1943,9 @@
           <a:p>
             <a:fld id="{FC363017-527F-4884-94E3-7C0A28AAD0EC}" type="datetimeFigureOut">
               <a:rPr lang="ru-RU" smtClean="0"/>
-              <a:t>12.05.2026</a:t>
+              <a:t>17.05.2026</a:t>
             </a:fld>
-            <a:endParaRPr lang="ru-RU"/>
+            <a:endParaRPr lang="ru-RU" dirty="0"/>
           </a:p>
         </p:txBody>
       </p:sp>
@@ -1693,7 +1964,7 @@
           <a:bodyPr/>
           <a:lstStyle/>
           <a:p>
-            <a:endParaRPr lang="ru-RU"/>
+            <a:endParaRPr lang="ru-RU" dirty="0"/>
           </a:p>
         </p:txBody>
       </p:sp>
@@ -1716,7 +1987,7 @@
               <a:rPr lang="ru-RU" smtClean="0"/>
               <a:t>‹#›</a:t>
             </a:fld>
-            <a:endParaRPr lang="ru-RU"/>
+            <a:endParaRPr lang="ru-RU" dirty="0"/>
           </a:p>
         </p:txBody>
       </p:sp>
@@ -1918,9 +2189,9 @@
           <a:p>
             <a:fld id="{FC363017-527F-4884-94E3-7C0A28AAD0EC}" type="datetimeFigureOut">
               <a:rPr lang="ru-RU" smtClean="0"/>
-              <a:t>12.05.2026</a:t>
+              <a:t>17.05.2026</a:t>
             </a:fld>
-            <a:endParaRPr lang="ru-RU"/>
+            <a:endParaRPr lang="ru-RU" dirty="0"/>
           </a:p>
         </p:txBody>
       </p:sp>
@@ -1939,7 +2210,7 @@
           <a:bodyPr/>
           <a:lstStyle/>
           <a:p>
-            <a:endParaRPr lang="ru-RU"/>
+            <a:endParaRPr lang="ru-RU" dirty="0"/>
           </a:p>
         </p:txBody>
       </p:sp>
@@ -1962,7 +2233,7 @@
               <a:rPr lang="ru-RU" smtClean="0"/>
               <a:t>‹#›</a:t>
             </a:fld>
-            <a:endParaRPr lang="ru-RU"/>
+            <a:endParaRPr lang="ru-RU" dirty="0"/>
           </a:p>
         </p:txBody>
       </p:sp>
@@ -2206,9 +2477,9 @@
           <a:p>
             <a:fld id="{FC363017-527F-4884-94E3-7C0A28AAD0EC}" type="datetimeFigureOut">
               <a:rPr lang="ru-RU" smtClean="0"/>
-              <a:t>12.05.2026</a:t>
+              <a:t>17.05.2026</a:t>
             </a:fld>
-            <a:endParaRPr lang="ru-RU"/>
+            <a:endParaRPr lang="ru-RU" dirty="0"/>
           </a:p>
         </p:txBody>
       </p:sp>
@@ -2227,7 +2498,7 @@
           <a:bodyPr/>
           <a:lstStyle/>
           <a:p>
-            <a:endParaRPr lang="ru-RU"/>
+            <a:endParaRPr lang="ru-RU" dirty="0"/>
           </a:p>
         </p:txBody>
       </p:sp>
@@ -2250,7 +2521,7 @@
               <a:rPr lang="ru-RU" smtClean="0"/>
               <a:t>‹#›</a:t>
             </a:fld>
-            <a:endParaRPr lang="ru-RU"/>
+            <a:endParaRPr lang="ru-RU" dirty="0"/>
           </a:p>
         </p:txBody>
       </p:sp>
@@ -2628,9 +2899,9 @@
           <a:p>
             <a:fld id="{FC363017-527F-4884-94E3-7C0A28AAD0EC}" type="datetimeFigureOut">
               <a:rPr lang="ru-RU" smtClean="0"/>
-              <a:t>12.05.2026</a:t>
+              <a:t>17.05.2026</a:t>
             </a:fld>
-            <a:endParaRPr lang="ru-RU"/>
+            <a:endParaRPr lang="ru-RU" dirty="0"/>
           </a:p>
         </p:txBody>
       </p:sp>
@@ -2649,7 +2920,7 @@
           <a:bodyPr/>
           <a:lstStyle/>
           <a:p>
-            <a:endParaRPr lang="ru-RU"/>
+            <a:endParaRPr lang="ru-RU" dirty="0"/>
           </a:p>
         </p:txBody>
       </p:sp>
@@ -2672,7 +2943,7 @@
               <a:rPr lang="ru-RU" smtClean="0"/>
               <a:t>‹#›</a:t>
             </a:fld>
-            <a:endParaRPr lang="ru-RU"/>
+            <a:endParaRPr lang="ru-RU" dirty="0"/>
           </a:p>
         </p:txBody>
       </p:sp>
@@ -2746,9 +3017,9 @@
           <a:p>
             <a:fld id="{FC363017-527F-4884-94E3-7C0A28AAD0EC}" type="datetimeFigureOut">
               <a:rPr lang="ru-RU" smtClean="0"/>
-              <a:t>12.05.2026</a:t>
+              <a:t>17.05.2026</a:t>
             </a:fld>
-            <a:endParaRPr lang="ru-RU"/>
+            <a:endParaRPr lang="ru-RU" dirty="0"/>
           </a:p>
         </p:txBody>
       </p:sp>
@@ -2767,7 +3038,7 @@
           <a:bodyPr/>
           <a:lstStyle/>
           <a:p>
-            <a:endParaRPr lang="ru-RU"/>
+            <a:endParaRPr lang="ru-RU" dirty="0"/>
           </a:p>
         </p:txBody>
       </p:sp>
@@ -2790,7 +3061,7 @@
               <a:rPr lang="ru-RU" smtClean="0"/>
               <a:t>‹#›</a:t>
             </a:fld>
-            <a:endParaRPr lang="ru-RU"/>
+            <a:endParaRPr lang="ru-RU" dirty="0"/>
           </a:p>
         </p:txBody>
       </p:sp>
@@ -2841,9 +3112,9 @@
           <a:p>
             <a:fld id="{FC363017-527F-4884-94E3-7C0A28AAD0EC}" type="datetimeFigureOut">
               <a:rPr lang="ru-RU" smtClean="0"/>
-              <a:t>12.05.2026</a:t>
+              <a:t>17.05.2026</a:t>
             </a:fld>
-            <a:endParaRPr lang="ru-RU"/>
+            <a:endParaRPr lang="ru-RU" dirty="0"/>
           </a:p>
         </p:txBody>
       </p:sp>
@@ -2862,7 +3133,7 @@
           <a:bodyPr/>
           <a:lstStyle/>
           <a:p>
-            <a:endParaRPr lang="ru-RU"/>
+            <a:endParaRPr lang="ru-RU" dirty="0"/>
           </a:p>
         </p:txBody>
       </p:sp>
@@ -2885,7 +3156,7 @@
               <a:rPr lang="ru-RU" smtClean="0"/>
               <a:t>‹#›</a:t>
             </a:fld>
-            <a:endParaRPr lang="ru-RU"/>
+            <a:endParaRPr lang="ru-RU" dirty="0"/>
           </a:p>
         </p:txBody>
       </p:sp>
@@ -3118,9 +3389,9 @@
           <a:p>
             <a:fld id="{FC363017-527F-4884-94E3-7C0A28AAD0EC}" type="datetimeFigureOut">
               <a:rPr lang="ru-RU" smtClean="0"/>
-              <a:t>12.05.2026</a:t>
+              <a:t>17.05.2026</a:t>
             </a:fld>
-            <a:endParaRPr lang="ru-RU"/>
+            <a:endParaRPr lang="ru-RU" dirty="0"/>
           </a:p>
         </p:txBody>
       </p:sp>
@@ -3139,7 +3410,7 @@
           <a:bodyPr/>
           <a:lstStyle/>
           <a:p>
-            <a:endParaRPr lang="ru-RU"/>
+            <a:endParaRPr lang="ru-RU" dirty="0"/>
           </a:p>
         </p:txBody>
       </p:sp>
@@ -3162,7 +3433,7 @@
               <a:rPr lang="ru-RU" smtClean="0"/>
               <a:t>‹#›</a:t>
             </a:fld>
-            <a:endParaRPr lang="ru-RU"/>
+            <a:endParaRPr lang="ru-RU" dirty="0"/>
           </a:p>
         </p:txBody>
       </p:sp>
@@ -3285,7 +3556,7 @@
             </a:lvl9pPr>
           </a:lstStyle>
           <a:p>
-            <a:endParaRPr lang="ru-RU"/>
+            <a:endParaRPr lang="ru-RU" dirty="0"/>
           </a:p>
         </p:txBody>
       </p:sp>
@@ -3371,9 +3642,9 @@
           <a:p>
             <a:fld id="{FC363017-527F-4884-94E3-7C0A28AAD0EC}" type="datetimeFigureOut">
               <a:rPr lang="ru-RU" smtClean="0"/>
-              <a:t>12.05.2026</a:t>
+              <a:t>17.05.2026</a:t>
             </a:fld>
-            <a:endParaRPr lang="ru-RU"/>
+            <a:endParaRPr lang="ru-RU" dirty="0"/>
           </a:p>
         </p:txBody>
       </p:sp>
@@ -3392,7 +3663,7 @@
           <a:bodyPr/>
           <a:lstStyle/>
           <a:p>
-            <a:endParaRPr lang="ru-RU"/>
+            <a:endParaRPr lang="ru-RU" dirty="0"/>
           </a:p>
         </p:txBody>
       </p:sp>
@@ -3415,7 +3686,7 @@
               <a:rPr lang="ru-RU" smtClean="0"/>
               <a:t>‹#›</a:t>
             </a:fld>
-            <a:endParaRPr lang="ru-RU"/>
+            <a:endParaRPr lang="ru-RU" dirty="0"/>
           </a:p>
         </p:txBody>
       </p:sp>
@@ -3584,9 +3855,9 @@
           <a:p>
             <a:fld id="{FC363017-527F-4884-94E3-7C0A28AAD0EC}" type="datetimeFigureOut">
               <a:rPr lang="ru-RU" smtClean="0"/>
-              <a:t>12.05.2026</a:t>
+              <a:t>17.05.2026</a:t>
             </a:fld>
-            <a:endParaRPr lang="ru-RU"/>
+            <a:endParaRPr lang="ru-RU" dirty="0"/>
           </a:p>
         </p:txBody>
       </p:sp>
@@ -3623,7 +3894,7 @@
             </a:lvl1pPr>
           </a:lstStyle>
           <a:p>
-            <a:endParaRPr lang="ru-RU"/>
+            <a:endParaRPr lang="ru-RU" dirty="0"/>
           </a:p>
         </p:txBody>
       </p:sp>
@@ -3664,7 +3935,7 @@
               <a:rPr lang="ru-RU" smtClean="0"/>
               <a:t>‹#›</a:t>
             </a:fld>
-            <a:endParaRPr lang="ru-RU"/>
+            <a:endParaRPr lang="ru-RU" dirty="0"/>
           </a:p>
         </p:txBody>
       </p:sp>
@@ -3997,8 +4268,8 @@
         </p:nvSpPr>
         <p:spPr>
           <a:xfrm>
-            <a:off x="2555776" y="2588102"/>
-            <a:ext cx="5524269" cy="1107996"/>
+            <a:off x="2771800" y="2567225"/>
+            <a:ext cx="5524269" cy="1723549"/>
           </a:xfrm>
           <a:prstGeom prst="rect">
             <a:avLst/>
@@ -4010,6 +4281,33 @@
             <a:spAutoFit/>
           </a:bodyPr>
           <a:lstStyle/>
+          <a:p>
+            <a:pPr algn="ctr"/>
+            <a:r>
+              <a:rPr lang="en-US" sz="4000" dirty="0" smtClean="0">
+                <a:solidFill>
+                  <a:srgbClr val="C00000"/>
+                </a:solidFill>
+                <a:latin typeface="Cooper Black" panose="0208090404030B020404" pitchFamily="18" charset="0"/>
+              </a:rPr>
+              <a:t>The </a:t>
+            </a:r>
+            <a:r>
+              <a:rPr lang="en-US" sz="4000" dirty="0" smtClean="0">
+                <a:solidFill>
+                  <a:srgbClr val="C00000"/>
+                </a:solidFill>
+                <a:latin typeface="Cooper Black" panose="0208090404030B020404" pitchFamily="18" charset="0"/>
+              </a:rPr>
+              <a:t>Convey’s</a:t>
+            </a:r>
+            <a:endParaRPr lang="ru-RU" sz="4000" dirty="0" smtClean="0">
+              <a:solidFill>
+                <a:srgbClr val="C00000"/>
+              </a:solidFill>
+              <a:latin typeface="Cooper Black" panose="0208090404030B020404" pitchFamily="18" charset="0"/>
+            </a:endParaRPr>
+          </a:p>
           <a:p>
             <a:r>
               <a:rPr lang="en-US" sz="6600" dirty="0" smtClean="0">
@@ -4018,8 +4316,593 @@
                 </a:solidFill>
                 <a:latin typeface="Cooper Black" panose="0208090404030B020404" pitchFamily="18" charset="0"/>
               </a:rPr>
-              <a:t>Game of Life</a:t>
-            </a:r>
+              <a:t>Game </a:t>
+            </a:r>
+            <a:r>
+              <a:rPr lang="en-US" sz="6600" dirty="0" smtClean="0">
+                <a:solidFill>
+                  <a:srgbClr val="C00000"/>
+                </a:solidFill>
+                <a:latin typeface="Cooper Black" panose="0208090404030B020404" pitchFamily="18" charset="0"/>
+              </a:rPr>
+              <a:t>of Life</a:t>
+            </a:r>
+          </a:p>
+        </p:txBody>
+      </p:sp>
+      <p:sp>
+        <p:nvSpPr>
+          <p:cNvPr id="5" name="Прямоугольник 4"/>
+          <p:cNvSpPr/>
+          <p:nvPr/>
+        </p:nvSpPr>
+        <p:spPr>
+          <a:xfrm>
+            <a:off x="2780184" y="5049688"/>
+            <a:ext cx="288032" cy="288032"/>
+          </a:xfrm>
+          <a:prstGeom prst="rect">
+            <a:avLst/>
+          </a:prstGeom>
+          <a:solidFill>
+            <a:srgbClr val="05FF1D"/>
+          </a:solidFill>
+          <a:ln>
+            <a:solidFill>
+              <a:schemeClr val="bg1"/>
+            </a:solidFill>
+          </a:ln>
+        </p:spPr>
+        <p:style>
+          <a:lnRef idx="2">
+            <a:schemeClr val="accent1">
+              <a:shade val="50000"/>
+            </a:schemeClr>
+          </a:lnRef>
+          <a:fillRef idx="1">
+            <a:schemeClr val="accent1"/>
+          </a:fillRef>
+          <a:effectRef idx="0">
+            <a:schemeClr val="accent1"/>
+          </a:effectRef>
+          <a:fontRef idx="minor">
+            <a:schemeClr val="lt1"/>
+          </a:fontRef>
+        </p:style>
+        <p:txBody>
+          <a:bodyPr rtlCol="0" anchor="ctr"/>
+          <a:lstStyle/>
+          <a:p>
+            <a:pPr algn="ctr"/>
+            <a:endParaRPr lang="ru-RU"/>
+          </a:p>
+        </p:txBody>
+      </p:sp>
+      <p:sp>
+        <p:nvSpPr>
+          <p:cNvPr id="6" name="Прямоугольник 5"/>
+          <p:cNvSpPr/>
+          <p:nvPr/>
+        </p:nvSpPr>
+        <p:spPr>
+          <a:xfrm>
+            <a:off x="3074661" y="5337720"/>
+            <a:ext cx="288032" cy="288032"/>
+          </a:xfrm>
+          <a:prstGeom prst="rect">
+            <a:avLst/>
+          </a:prstGeom>
+          <a:solidFill>
+            <a:srgbClr val="05FF1D"/>
+          </a:solidFill>
+          <a:ln>
+            <a:solidFill>
+              <a:schemeClr val="bg1"/>
+            </a:solidFill>
+          </a:ln>
+        </p:spPr>
+        <p:style>
+          <a:lnRef idx="2">
+            <a:schemeClr val="accent1">
+              <a:shade val="50000"/>
+            </a:schemeClr>
+          </a:lnRef>
+          <a:fillRef idx="1">
+            <a:schemeClr val="accent1"/>
+          </a:fillRef>
+          <a:effectRef idx="0">
+            <a:schemeClr val="accent1"/>
+          </a:effectRef>
+          <a:fontRef idx="minor">
+            <a:schemeClr val="lt1"/>
+          </a:fontRef>
+        </p:style>
+        <p:txBody>
+          <a:bodyPr rtlCol="0" anchor="ctr"/>
+          <a:lstStyle/>
+          <a:p>
+            <a:pPr algn="ctr"/>
+            <a:endParaRPr lang="ru-RU"/>
+          </a:p>
+        </p:txBody>
+      </p:sp>
+      <p:sp>
+        <p:nvSpPr>
+          <p:cNvPr id="7" name="Прямоугольник 6"/>
+          <p:cNvSpPr/>
+          <p:nvPr/>
+        </p:nvSpPr>
+        <p:spPr>
+          <a:xfrm>
+            <a:off x="3074661" y="5597917"/>
+            <a:ext cx="288032" cy="288032"/>
+          </a:xfrm>
+          <a:prstGeom prst="rect">
+            <a:avLst/>
+          </a:prstGeom>
+          <a:solidFill>
+            <a:srgbClr val="05FF1D"/>
+          </a:solidFill>
+          <a:ln>
+            <a:solidFill>
+              <a:schemeClr val="bg1"/>
+            </a:solidFill>
+          </a:ln>
+        </p:spPr>
+        <p:style>
+          <a:lnRef idx="2">
+            <a:schemeClr val="accent1">
+              <a:shade val="50000"/>
+            </a:schemeClr>
+          </a:lnRef>
+          <a:fillRef idx="1">
+            <a:schemeClr val="accent1"/>
+          </a:fillRef>
+          <a:effectRef idx="0">
+            <a:schemeClr val="accent1"/>
+          </a:effectRef>
+          <a:fontRef idx="minor">
+            <a:schemeClr val="lt1"/>
+          </a:fontRef>
+        </p:style>
+        <p:txBody>
+          <a:bodyPr rtlCol="0" anchor="ctr"/>
+          <a:lstStyle/>
+          <a:p>
+            <a:pPr algn="ctr"/>
+            <a:endParaRPr lang="ru-RU"/>
+          </a:p>
+        </p:txBody>
+      </p:sp>
+      <p:sp>
+        <p:nvSpPr>
+          <p:cNvPr id="8" name="Прямоугольник 7"/>
+          <p:cNvSpPr/>
+          <p:nvPr/>
+        </p:nvSpPr>
+        <p:spPr>
+          <a:xfrm>
+            <a:off x="2780184" y="5597917"/>
+            <a:ext cx="288032" cy="288032"/>
+          </a:xfrm>
+          <a:prstGeom prst="rect">
+            <a:avLst/>
+          </a:prstGeom>
+          <a:solidFill>
+            <a:srgbClr val="05FF1D"/>
+          </a:solidFill>
+          <a:ln>
+            <a:solidFill>
+              <a:schemeClr val="bg1"/>
+            </a:solidFill>
+          </a:ln>
+        </p:spPr>
+        <p:style>
+          <a:lnRef idx="2">
+            <a:schemeClr val="accent1">
+              <a:shade val="50000"/>
+            </a:schemeClr>
+          </a:lnRef>
+          <a:fillRef idx="1">
+            <a:schemeClr val="accent1"/>
+          </a:fillRef>
+          <a:effectRef idx="0">
+            <a:schemeClr val="accent1"/>
+          </a:effectRef>
+          <a:fontRef idx="minor">
+            <a:schemeClr val="lt1"/>
+          </a:fontRef>
+        </p:style>
+        <p:txBody>
+          <a:bodyPr rtlCol="0" anchor="ctr"/>
+          <a:lstStyle/>
+          <a:p>
+            <a:pPr algn="ctr"/>
+            <a:endParaRPr lang="ru-RU"/>
+          </a:p>
+        </p:txBody>
+      </p:sp>
+      <p:sp>
+        <p:nvSpPr>
+          <p:cNvPr id="9" name="Прямоугольник 8"/>
+          <p:cNvSpPr/>
+          <p:nvPr/>
+        </p:nvSpPr>
+        <p:spPr>
+          <a:xfrm>
+            <a:off x="2492152" y="5597917"/>
+            <a:ext cx="288032" cy="288032"/>
+          </a:xfrm>
+          <a:prstGeom prst="rect">
+            <a:avLst/>
+          </a:prstGeom>
+          <a:solidFill>
+            <a:srgbClr val="05FF1D"/>
+          </a:solidFill>
+          <a:ln>
+            <a:solidFill>
+              <a:schemeClr val="bg1"/>
+            </a:solidFill>
+          </a:ln>
+        </p:spPr>
+        <p:style>
+          <a:lnRef idx="2">
+            <a:schemeClr val="accent1">
+              <a:shade val="50000"/>
+            </a:schemeClr>
+          </a:lnRef>
+          <a:fillRef idx="1">
+            <a:schemeClr val="accent1"/>
+          </a:fillRef>
+          <a:effectRef idx="0">
+            <a:schemeClr val="accent1"/>
+          </a:effectRef>
+          <a:fontRef idx="minor">
+            <a:schemeClr val="lt1"/>
+          </a:fontRef>
+        </p:style>
+        <p:txBody>
+          <a:bodyPr rtlCol="0" anchor="ctr"/>
+          <a:lstStyle/>
+          <a:p>
+            <a:pPr algn="ctr"/>
+            <a:endParaRPr lang="ru-RU"/>
+          </a:p>
+        </p:txBody>
+      </p:sp>
+      <p:sp>
+        <p:nvSpPr>
+          <p:cNvPr id="10" name="Прямоугольник 9"/>
+          <p:cNvSpPr/>
+          <p:nvPr/>
+        </p:nvSpPr>
+        <p:spPr>
+          <a:xfrm>
+            <a:off x="8005249" y="1124744"/>
+            <a:ext cx="288032" cy="288032"/>
+          </a:xfrm>
+          <a:prstGeom prst="rect">
+            <a:avLst/>
+          </a:prstGeom>
+          <a:solidFill>
+            <a:srgbClr val="05FF1D"/>
+          </a:solidFill>
+          <a:ln>
+            <a:solidFill>
+              <a:schemeClr val="bg1"/>
+            </a:solidFill>
+          </a:ln>
+        </p:spPr>
+        <p:style>
+          <a:lnRef idx="2">
+            <a:schemeClr val="accent1">
+              <a:shade val="50000"/>
+            </a:schemeClr>
+          </a:lnRef>
+          <a:fillRef idx="1">
+            <a:schemeClr val="accent1"/>
+          </a:fillRef>
+          <a:effectRef idx="0">
+            <a:schemeClr val="accent1"/>
+          </a:effectRef>
+          <a:fontRef idx="minor">
+            <a:schemeClr val="lt1"/>
+          </a:fontRef>
+        </p:style>
+        <p:txBody>
+          <a:bodyPr rtlCol="0" anchor="ctr"/>
+          <a:lstStyle/>
+          <a:p>
+            <a:pPr algn="ctr"/>
+            <a:endParaRPr lang="ru-RU"/>
+          </a:p>
+        </p:txBody>
+      </p:sp>
+      <p:sp>
+        <p:nvSpPr>
+          <p:cNvPr id="11" name="Прямоугольник 10"/>
+          <p:cNvSpPr/>
+          <p:nvPr/>
+        </p:nvSpPr>
+        <p:spPr>
+          <a:xfrm>
+            <a:off x="8293281" y="1429772"/>
+            <a:ext cx="288032" cy="288032"/>
+          </a:xfrm>
+          <a:prstGeom prst="rect">
+            <a:avLst/>
+          </a:prstGeom>
+          <a:solidFill>
+            <a:srgbClr val="05FF1D"/>
+          </a:solidFill>
+          <a:ln>
+            <a:solidFill>
+              <a:schemeClr val="bg1"/>
+            </a:solidFill>
+          </a:ln>
+        </p:spPr>
+        <p:style>
+          <a:lnRef idx="2">
+            <a:schemeClr val="accent1">
+              <a:shade val="50000"/>
+            </a:schemeClr>
+          </a:lnRef>
+          <a:fillRef idx="1">
+            <a:schemeClr val="accent1"/>
+          </a:fillRef>
+          <a:effectRef idx="0">
+            <a:schemeClr val="accent1"/>
+          </a:effectRef>
+          <a:fontRef idx="minor">
+            <a:schemeClr val="lt1"/>
+          </a:fontRef>
+        </p:style>
+        <p:txBody>
+          <a:bodyPr rtlCol="0" anchor="ctr"/>
+          <a:lstStyle/>
+          <a:p>
+            <a:pPr algn="ctr"/>
+            <a:endParaRPr lang="ru-RU"/>
+          </a:p>
+        </p:txBody>
+      </p:sp>
+      <p:sp>
+        <p:nvSpPr>
+          <p:cNvPr id="12" name="Прямоугольник 11"/>
+          <p:cNvSpPr/>
+          <p:nvPr/>
+        </p:nvSpPr>
+        <p:spPr>
+          <a:xfrm>
+            <a:off x="8581313" y="1734800"/>
+            <a:ext cx="288032" cy="288032"/>
+          </a:xfrm>
+          <a:prstGeom prst="rect">
+            <a:avLst/>
+          </a:prstGeom>
+          <a:solidFill>
+            <a:srgbClr val="05FF1D"/>
+          </a:solidFill>
+          <a:ln>
+            <a:solidFill>
+              <a:schemeClr val="bg1"/>
+            </a:solidFill>
+          </a:ln>
+        </p:spPr>
+        <p:style>
+          <a:lnRef idx="2">
+            <a:schemeClr val="accent1">
+              <a:shade val="50000"/>
+            </a:schemeClr>
+          </a:lnRef>
+          <a:fillRef idx="1">
+            <a:schemeClr val="accent1"/>
+          </a:fillRef>
+          <a:effectRef idx="0">
+            <a:schemeClr val="accent1"/>
+          </a:effectRef>
+          <a:fontRef idx="minor">
+            <a:schemeClr val="lt1"/>
+          </a:fontRef>
+        </p:style>
+        <p:txBody>
+          <a:bodyPr rtlCol="0" anchor="ctr"/>
+          <a:lstStyle/>
+          <a:p>
+            <a:pPr algn="ctr"/>
+            <a:endParaRPr lang="ru-RU"/>
+          </a:p>
+        </p:txBody>
+      </p:sp>
+      <p:sp>
+        <p:nvSpPr>
+          <p:cNvPr id="13" name="Прямоугольник 12"/>
+          <p:cNvSpPr/>
+          <p:nvPr/>
+        </p:nvSpPr>
+        <p:spPr>
+          <a:xfrm>
+            <a:off x="8581313" y="2022832"/>
+            <a:ext cx="288032" cy="288032"/>
+          </a:xfrm>
+          <a:prstGeom prst="rect">
+            <a:avLst/>
+          </a:prstGeom>
+          <a:solidFill>
+            <a:srgbClr val="05FF1D"/>
+          </a:solidFill>
+          <a:ln>
+            <a:solidFill>
+              <a:schemeClr val="bg1"/>
+            </a:solidFill>
+          </a:ln>
+        </p:spPr>
+        <p:style>
+          <a:lnRef idx="2">
+            <a:schemeClr val="accent1">
+              <a:shade val="50000"/>
+            </a:schemeClr>
+          </a:lnRef>
+          <a:fillRef idx="1">
+            <a:schemeClr val="accent1"/>
+          </a:fillRef>
+          <a:effectRef idx="0">
+            <a:schemeClr val="accent1"/>
+          </a:effectRef>
+          <a:fontRef idx="minor">
+            <a:schemeClr val="lt1"/>
+          </a:fontRef>
+        </p:style>
+        <p:txBody>
+          <a:bodyPr rtlCol="0" anchor="ctr"/>
+          <a:lstStyle/>
+          <a:p>
+            <a:pPr algn="ctr"/>
+            <a:endParaRPr lang="ru-RU"/>
+          </a:p>
+        </p:txBody>
+      </p:sp>
+      <p:sp>
+        <p:nvSpPr>
+          <p:cNvPr id="14" name="Прямоугольник 13"/>
+          <p:cNvSpPr/>
+          <p:nvPr/>
+        </p:nvSpPr>
+        <p:spPr>
+          <a:xfrm>
+            <a:off x="7164288" y="1735993"/>
+            <a:ext cx="288032" cy="288032"/>
+          </a:xfrm>
+          <a:prstGeom prst="rect">
+            <a:avLst/>
+          </a:prstGeom>
+          <a:solidFill>
+            <a:srgbClr val="05FF1D"/>
+          </a:solidFill>
+          <a:ln>
+            <a:solidFill>
+              <a:schemeClr val="bg1"/>
+            </a:solidFill>
+          </a:ln>
+        </p:spPr>
+        <p:style>
+          <a:lnRef idx="2">
+            <a:schemeClr val="accent1">
+              <a:shade val="50000"/>
+            </a:schemeClr>
+          </a:lnRef>
+          <a:fillRef idx="1">
+            <a:schemeClr val="accent1"/>
+          </a:fillRef>
+          <a:effectRef idx="0">
+            <a:schemeClr val="accent1"/>
+          </a:effectRef>
+          <a:fontRef idx="minor">
+            <a:schemeClr val="lt1"/>
+          </a:fontRef>
+        </p:style>
+        <p:txBody>
+          <a:bodyPr rtlCol="0" anchor="ctr"/>
+          <a:lstStyle/>
+          <a:p>
+            <a:pPr algn="ctr"/>
+            <a:endParaRPr lang="ru-RU"/>
+          </a:p>
+        </p:txBody>
+      </p:sp>
+      <p:sp>
+        <p:nvSpPr>
+          <p:cNvPr id="15" name="Прямоугольник 14"/>
+          <p:cNvSpPr/>
+          <p:nvPr/>
+        </p:nvSpPr>
+        <p:spPr>
+          <a:xfrm>
+            <a:off x="3635896" y="6453336"/>
+            <a:ext cx="288032" cy="288032"/>
+          </a:xfrm>
+          <a:prstGeom prst="rect">
+            <a:avLst/>
+          </a:prstGeom>
+          <a:solidFill>
+            <a:srgbClr val="05FF1D"/>
+          </a:solidFill>
+          <a:ln>
+            <a:solidFill>
+              <a:schemeClr val="bg1"/>
+            </a:solidFill>
+          </a:ln>
+        </p:spPr>
+        <p:style>
+          <a:lnRef idx="2">
+            <a:schemeClr val="accent1">
+              <a:shade val="50000"/>
+            </a:schemeClr>
+          </a:lnRef>
+          <a:fillRef idx="1">
+            <a:schemeClr val="accent1"/>
+          </a:fillRef>
+          <a:effectRef idx="0">
+            <a:schemeClr val="accent1"/>
+          </a:effectRef>
+          <a:fontRef idx="minor">
+            <a:schemeClr val="lt1"/>
+          </a:fontRef>
+        </p:style>
+        <p:txBody>
+          <a:bodyPr rtlCol="0" anchor="ctr"/>
+          <a:lstStyle/>
+          <a:p>
+            <a:pPr algn="ctr"/>
+            <a:endParaRPr lang="ru-RU"/>
+          </a:p>
+        </p:txBody>
+      </p:sp>
+      <p:sp>
+        <p:nvSpPr>
+          <p:cNvPr id="16" name="Прямоугольник 15"/>
+          <p:cNvSpPr/>
+          <p:nvPr/>
+        </p:nvSpPr>
+        <p:spPr>
+          <a:xfrm>
+            <a:off x="3923928" y="6453336"/>
+            <a:ext cx="288032" cy="288032"/>
+          </a:xfrm>
+          <a:prstGeom prst="rect">
+            <a:avLst/>
+          </a:prstGeom>
+          <a:solidFill>
+            <a:srgbClr val="05FF1D"/>
+          </a:solidFill>
+          <a:ln>
+            <a:solidFill>
+              <a:schemeClr val="bg1"/>
+            </a:solidFill>
+          </a:ln>
+        </p:spPr>
+        <p:style>
+          <a:lnRef idx="2">
+            <a:schemeClr val="accent1">
+              <a:shade val="50000"/>
+            </a:schemeClr>
+          </a:lnRef>
+          <a:fillRef idx="1">
+            <a:schemeClr val="accent1"/>
+          </a:fillRef>
+          <a:effectRef idx="0">
+            <a:schemeClr val="accent1"/>
+          </a:effectRef>
+          <a:fontRef idx="minor">
+            <a:schemeClr val="lt1"/>
+          </a:fontRef>
+        </p:style>
+        <p:txBody>
+          <a:bodyPr rtlCol="0" anchor="ctr"/>
+          <a:lstStyle/>
+          <a:p>
+            <a:pPr algn="ctr"/>
+            <a:endParaRPr lang="ru-RU"/>
           </a:p>
         </p:txBody>
       </p:sp>
@@ -4033,6 +4916,360 @@
   <p:clrMapOvr>
     <a:masterClrMapping/>
   </p:clrMapOvr>
+  <p:timing>
+    <p:tnLst>
+      <p:par>
+        <p:cTn id="1" dur="indefinite" restart="never" nodeType="tmRoot"/>
+      </p:par>
+    </p:tnLst>
+  </p:timing>
+</p:sld>
+</file>
+
+<file path=ppt/slides/slide10.xml><?xml version="1.0" encoding="utf-8"?>
+<p:sld xmlns:a="http://schemas.openxmlformats.org/drawingml/2006/main" xmlns:r="http://schemas.openxmlformats.org/officeDocument/2006/relationships" xmlns:p="http://schemas.openxmlformats.org/presentationml/2006/main">
+  <p:cSld>
+    <p:spTree>
+      <p:nvGrpSpPr>
+        <p:cNvPr id="1" name=""/>
+        <p:cNvGrpSpPr/>
+        <p:nvPr/>
+      </p:nvGrpSpPr>
+      <p:grpSpPr>
+        <a:xfrm>
+          <a:off x="0" y="0"/>
+          <a:ext cx="0" cy="0"/>
+          <a:chOff x="0" y="0"/>
+          <a:chExt cx="0" cy="0"/>
+        </a:xfrm>
+      </p:grpSpPr>
+      <p:pic>
+        <p:nvPicPr>
+          <p:cNvPr id="2" name="Рисунок 1"/>
+          <p:cNvPicPr>
+            <a:picLocks noChangeAspect="1"/>
+          </p:cNvPicPr>
+          <p:nvPr/>
+        </p:nvPicPr>
+        <p:blipFill>
+          <a:blip r:embed="rId3" cstate="print">
+            <a:extLst>
+              <a:ext uri="{28A0092B-C50C-407E-A947-70E740481C1C}">
+                <a14:useLocalDpi xmlns:a14="http://schemas.microsoft.com/office/drawing/2010/main" val="0"/>
+              </a:ext>
+            </a:extLst>
+          </a:blip>
+          <a:stretch>
+            <a:fillRect/>
+          </a:stretch>
+        </p:blipFill>
+        <p:spPr>
+          <a:xfrm>
+            <a:off x="0" y="0"/>
+            <a:ext cx="9144000" cy="6858000"/>
+          </a:xfrm>
+          <a:prstGeom prst="rect">
+            <a:avLst/>
+          </a:prstGeom>
+        </p:spPr>
+      </p:pic>
+      <p:sp>
+        <p:nvSpPr>
+          <p:cNvPr id="3" name="TextBox 2"/>
+          <p:cNvSpPr txBox="1"/>
+          <p:nvPr/>
+        </p:nvSpPr>
+        <p:spPr>
+          <a:xfrm>
+            <a:off x="2428700" y="1196752"/>
+            <a:ext cx="3570208" cy="707886"/>
+          </a:xfrm>
+          <a:prstGeom prst="rect">
+            <a:avLst/>
+          </a:prstGeom>
+          <a:noFill/>
+        </p:spPr>
+        <p:txBody>
+          <a:bodyPr wrap="none" rtlCol="0">
+            <a:spAutoFit/>
+          </a:bodyPr>
+          <a:lstStyle/>
+          <a:p>
+            <a:r>
+              <a:rPr lang="ru-RU" sz="4000" b="1" dirty="0" smtClean="0">
+                <a:latin typeface="Consolas" panose="020B0609020204030204" pitchFamily="49" charset="0"/>
+              </a:rPr>
+              <a:t>Что в итоге?</a:t>
+            </a:r>
+            <a:endParaRPr lang="en-US" sz="4000" b="1" dirty="0" smtClean="0">
+              <a:latin typeface="Consolas" panose="020B0609020204030204" pitchFamily="49" charset="0"/>
+            </a:endParaRPr>
+          </a:p>
+        </p:txBody>
+      </p:sp>
+      <p:sp>
+        <p:nvSpPr>
+          <p:cNvPr id="6" name="TextBox 5"/>
+          <p:cNvSpPr txBox="1"/>
+          <p:nvPr/>
+        </p:nvSpPr>
+        <p:spPr>
+          <a:xfrm>
+            <a:off x="2428699" y="2237963"/>
+            <a:ext cx="6469949" cy="830997"/>
+          </a:xfrm>
+          <a:prstGeom prst="rect">
+            <a:avLst/>
+          </a:prstGeom>
+          <a:noFill/>
+        </p:spPr>
+        <p:txBody>
+          <a:bodyPr wrap="square" rtlCol="0">
+            <a:spAutoFit/>
+          </a:bodyPr>
+          <a:lstStyle/>
+          <a:p>
+            <a:r>
+              <a:rPr lang="ru-RU" sz="2400" b="1" dirty="0">
+                <a:solidFill>
+                  <a:srgbClr val="C00000"/>
+                </a:solidFill>
+                <a:latin typeface="Consolas" panose="020B0609020204030204" pitchFamily="49" charset="0"/>
+              </a:rPr>
+              <a:t>-</a:t>
+            </a:r>
+            <a:r>
+              <a:rPr lang="en-US" sz="2400" b="1" dirty="0" smtClean="0">
+                <a:latin typeface="Consolas" panose="020B0609020204030204" pitchFamily="49" charset="0"/>
+              </a:rPr>
+              <a:t> </a:t>
+            </a:r>
+            <a:r>
+              <a:rPr lang="ru-RU" sz="2400" b="1" dirty="0" smtClean="0">
+                <a:latin typeface="Consolas" panose="020B0609020204030204" pitchFamily="49" charset="0"/>
+              </a:rPr>
+              <a:t>Высокая нагрузка на аппаратную часть.</a:t>
+            </a:r>
+          </a:p>
+        </p:txBody>
+      </p:sp>
+      <p:pic>
+        <p:nvPicPr>
+          <p:cNvPr id="7" name="Рисунок 6"/>
+          <p:cNvPicPr>
+            <a:picLocks noChangeAspect="1"/>
+          </p:cNvPicPr>
+          <p:nvPr/>
+        </p:nvPicPr>
+        <p:blipFill>
+          <a:blip r:embed="rId4">
+            <a:extLst>
+              <a:ext uri="{28A0092B-C50C-407E-A947-70E740481C1C}">
+                <a14:useLocalDpi xmlns:a14="http://schemas.microsoft.com/office/drawing/2010/main" val="0"/>
+              </a:ext>
+            </a:extLst>
+          </a:blip>
+          <a:stretch>
+            <a:fillRect/>
+          </a:stretch>
+        </p:blipFill>
+        <p:spPr>
+          <a:xfrm>
+            <a:off x="2843808" y="4581128"/>
+            <a:ext cx="5516922" cy="1152128"/>
+          </a:xfrm>
+          <a:prstGeom prst="rect">
+            <a:avLst/>
+          </a:prstGeom>
+          <a:ln w="38100">
+            <a:solidFill>
+              <a:srgbClr val="FF0000"/>
+            </a:solidFill>
+            <a:prstDash val="dash"/>
+          </a:ln>
+        </p:spPr>
+      </p:pic>
+      <p:sp>
+        <p:nvSpPr>
+          <p:cNvPr id="9" name="TextBox 8"/>
+          <p:cNvSpPr txBox="1"/>
+          <p:nvPr/>
+        </p:nvSpPr>
+        <p:spPr>
+          <a:xfrm>
+            <a:off x="2441778" y="3246075"/>
+            <a:ext cx="6469949" cy="830997"/>
+          </a:xfrm>
+          <a:prstGeom prst="rect">
+            <a:avLst/>
+          </a:prstGeom>
+          <a:noFill/>
+        </p:spPr>
+        <p:txBody>
+          <a:bodyPr wrap="square" rtlCol="0">
+            <a:spAutoFit/>
+          </a:bodyPr>
+          <a:lstStyle/>
+          <a:p>
+            <a:r>
+              <a:rPr lang="ru-RU" sz="2400" b="1" dirty="0">
+                <a:solidFill>
+                  <a:srgbClr val="C00000"/>
+                </a:solidFill>
+                <a:latin typeface="Consolas" panose="020B0609020204030204" pitchFamily="49" charset="0"/>
+              </a:rPr>
+              <a:t>-</a:t>
+            </a:r>
+            <a:r>
+              <a:rPr lang="en-US" sz="2400" b="1" dirty="0" smtClean="0">
+                <a:latin typeface="Consolas" panose="020B0609020204030204" pitchFamily="49" charset="0"/>
+              </a:rPr>
+              <a:t> </a:t>
+            </a:r>
+            <a:r>
+              <a:rPr lang="ru-RU" sz="2400" dirty="0" smtClean="0">
+                <a:latin typeface="Consolas" panose="020B0609020204030204" pitchFamily="49" charset="0"/>
+              </a:rPr>
+              <a:t>Низкая эффективность </a:t>
+            </a:r>
+            <a:r>
+              <a:rPr lang="ru-RU" sz="2400" dirty="0">
+                <a:latin typeface="Consolas" panose="020B0609020204030204" pitchFamily="49" charset="0"/>
+              </a:rPr>
+              <a:t>детальной настройки состояния клеток</a:t>
+            </a:r>
+            <a:r>
+              <a:rPr lang="ru-RU" sz="2400" dirty="0" smtClean="0">
+                <a:latin typeface="Consolas" panose="020B0609020204030204" pitchFamily="49" charset="0"/>
+              </a:rPr>
+              <a:t>.</a:t>
+            </a:r>
+          </a:p>
+        </p:txBody>
+      </p:sp>
+    </p:spTree>
+    <p:extLst>
+      <p:ext uri="{BB962C8B-B14F-4D97-AF65-F5344CB8AC3E}">
+        <p14:creationId xmlns:p14="http://schemas.microsoft.com/office/powerpoint/2010/main" val="602535896"/>
+      </p:ext>
+    </p:extLst>
+  </p:cSld>
+  <p:clrMapOvr>
+    <a:masterClrMapping/>
+  </p:clrMapOvr>
+  <mc:AlternateContent xmlns:mc="http://schemas.openxmlformats.org/markup-compatibility/2006" xmlns:p14="http://schemas.microsoft.com/office/powerpoint/2010/main">
+    <mc:Choice Requires="p14">
+      <p:transition p14:dur="0"/>
+    </mc:Choice>
+    <mc:Fallback xmlns="">
+      <p:transition/>
+    </mc:Fallback>
+  </mc:AlternateContent>
+  <p:timing>
+    <p:tnLst>
+      <p:par>
+        <p:cTn id="1" dur="indefinite" restart="never" nodeType="tmRoot"/>
+      </p:par>
+    </p:tnLst>
+  </p:timing>
+</p:sld>
+</file>
+
+<file path=ppt/slides/slide11.xml><?xml version="1.0" encoding="utf-8"?>
+<p:sld xmlns:a="http://schemas.openxmlformats.org/drawingml/2006/main" xmlns:r="http://schemas.openxmlformats.org/officeDocument/2006/relationships" xmlns:p="http://schemas.openxmlformats.org/presentationml/2006/main">
+  <p:cSld>
+    <p:spTree>
+      <p:nvGrpSpPr>
+        <p:cNvPr id="1" name=""/>
+        <p:cNvGrpSpPr/>
+        <p:nvPr/>
+      </p:nvGrpSpPr>
+      <p:grpSpPr>
+        <a:xfrm>
+          <a:off x="0" y="0"/>
+          <a:ext cx="0" cy="0"/>
+          <a:chOff x="0" y="0"/>
+          <a:chExt cx="0" cy="0"/>
+        </a:xfrm>
+      </p:grpSpPr>
+      <p:pic>
+        <p:nvPicPr>
+          <p:cNvPr id="2" name="Рисунок 1"/>
+          <p:cNvPicPr>
+            <a:picLocks noChangeAspect="1"/>
+          </p:cNvPicPr>
+          <p:nvPr/>
+        </p:nvPicPr>
+        <p:blipFill>
+          <a:blip r:embed="rId3" cstate="print">
+            <a:extLst>
+              <a:ext uri="{28A0092B-C50C-407E-A947-70E740481C1C}">
+                <a14:useLocalDpi xmlns:a14="http://schemas.microsoft.com/office/drawing/2010/main" val="0"/>
+              </a:ext>
+            </a:extLst>
+          </a:blip>
+          <a:stretch>
+            <a:fillRect/>
+          </a:stretch>
+        </p:blipFill>
+        <p:spPr>
+          <a:xfrm>
+            <a:off x="0" y="0"/>
+            <a:ext cx="9144000" cy="6858000"/>
+          </a:xfrm>
+          <a:prstGeom prst="rect">
+            <a:avLst/>
+          </a:prstGeom>
+        </p:spPr>
+      </p:pic>
+      <p:pic>
+        <p:nvPicPr>
+          <p:cNvPr id="4" name="Рисунок 3"/>
+          <p:cNvPicPr>
+            <a:picLocks noChangeAspect="1"/>
+          </p:cNvPicPr>
+          <p:nvPr/>
+        </p:nvPicPr>
+        <p:blipFill>
+          <a:blip r:embed="rId4">
+            <a:extLst>
+              <a:ext uri="{28A0092B-C50C-407E-A947-70E740481C1C}">
+                <a14:useLocalDpi xmlns:a14="http://schemas.microsoft.com/office/drawing/2010/main" val="0"/>
+              </a:ext>
+            </a:extLst>
+          </a:blip>
+          <a:stretch>
+            <a:fillRect/>
+          </a:stretch>
+        </p:blipFill>
+        <p:spPr>
+          <a:xfrm>
+            <a:off x="0" y="620688"/>
+            <a:ext cx="9144000" cy="6120680"/>
+          </a:xfrm>
+          <a:prstGeom prst="rect">
+            <a:avLst/>
+          </a:prstGeom>
+        </p:spPr>
+      </p:pic>
+    </p:spTree>
+    <p:extLst>
+      <p:ext uri="{BB962C8B-B14F-4D97-AF65-F5344CB8AC3E}">
+        <p14:creationId xmlns:p14="http://schemas.microsoft.com/office/powerpoint/2010/main" val="404484143"/>
+      </p:ext>
+    </p:extLst>
+  </p:cSld>
+  <p:clrMapOvr>
+    <a:masterClrMapping/>
+  </p:clrMapOvr>
+  <mc:AlternateContent xmlns:mc="http://schemas.openxmlformats.org/markup-compatibility/2006" xmlns:p14="http://schemas.microsoft.com/office/powerpoint/2010/main">
+    <mc:Choice Requires="p14">
+      <p:transition p14:dur="0"/>
+    </mc:Choice>
+    <mc:Fallback xmlns="">
+      <p:transition/>
+    </mc:Fallback>
+  </mc:AlternateContent>
   <p:timing>
     <p:tnLst>
       <p:par>
@@ -4139,7 +5376,7 @@
         <p:spPr>
           <a:xfrm>
             <a:off x="2483768" y="2276871"/>
-            <a:ext cx="6408712" cy="646331"/>
+            <a:ext cx="6408712" cy="707886"/>
           </a:xfrm>
           <a:prstGeom prst="rect">
             <a:avLst/>
@@ -4152,24 +5389,30 @@
           <a:lstStyle/>
           <a:p>
             <a:r>
-              <a:rPr lang="ru-RU" dirty="0" smtClean="0">
+              <a:rPr lang="ru-RU" sz="2000" b="1" dirty="0" smtClean="0">
                 <a:latin typeface="Consolas" panose="020B0609020204030204" pitchFamily="49" charset="0"/>
               </a:rPr>
-              <a:t>1. Живая </a:t>
-            </a:r>
-            <a:r>
-              <a:rPr lang="ru-RU" dirty="0">
+              <a:t>1.</a:t>
+            </a:r>
+            <a:r>
+              <a:rPr lang="ru-RU" sz="2000" dirty="0" smtClean="0">
+                <a:latin typeface="Consolas" panose="020B0609020204030204" pitchFamily="49" charset="0"/>
+              </a:rPr>
+              <a:t> Живая </a:t>
+            </a:r>
+            <a:r>
+              <a:rPr lang="ru-RU" sz="2000" dirty="0">
                 <a:latin typeface="Consolas" panose="020B0609020204030204" pitchFamily="49" charset="0"/>
               </a:rPr>
               <a:t>клетка с менее чем двумя живыми соседями </a:t>
             </a:r>
             <a:r>
-              <a:rPr lang="ru-RU" dirty="0" smtClean="0">
+              <a:rPr lang="ru-RU" sz="2000" dirty="0" smtClean="0">
                 <a:latin typeface="Consolas" panose="020B0609020204030204" pitchFamily="49" charset="0"/>
               </a:rPr>
               <a:t>умирает.</a:t>
             </a:r>
-            <a:endParaRPr lang="ru-RU" dirty="0">
+            <a:endParaRPr lang="ru-RU" sz="2000" dirty="0">
               <a:latin typeface="Consolas" panose="020B0609020204030204" pitchFamily="49" charset="0"/>
             </a:endParaRPr>
           </a:p>
@@ -4184,7 +5427,7 @@
         <p:spPr>
           <a:xfrm>
             <a:off x="2483768" y="3167800"/>
-            <a:ext cx="6408712" cy="646331"/>
+            <a:ext cx="6408712" cy="1015663"/>
           </a:xfrm>
           <a:prstGeom prst="rect">
             <a:avLst/>
@@ -4197,24 +5440,30 @@
           <a:lstStyle/>
           <a:p>
             <a:r>
-              <a:rPr lang="ru-RU" dirty="0" smtClean="0">
+              <a:rPr lang="ru-RU" sz="2000" b="1" dirty="0" smtClean="0">
                 <a:latin typeface="Consolas" panose="020B0609020204030204" pitchFamily="49" charset="0"/>
               </a:rPr>
-              <a:t>2. Живая </a:t>
-            </a:r>
-            <a:r>
-              <a:rPr lang="ru-RU" dirty="0">
+              <a:t>2.</a:t>
+            </a:r>
+            <a:r>
+              <a:rPr lang="ru-RU" sz="2000" dirty="0" smtClean="0">
+                <a:latin typeface="Consolas" panose="020B0609020204030204" pitchFamily="49" charset="0"/>
+              </a:rPr>
+              <a:t> Живая </a:t>
+            </a:r>
+            <a:r>
+              <a:rPr lang="ru-RU" sz="2000" dirty="0">
                 <a:latin typeface="Consolas" panose="020B0609020204030204" pitchFamily="49" charset="0"/>
               </a:rPr>
               <a:t>клетка с двумя или тремя живыми соседями продолжает жить в следующем </a:t>
             </a:r>
             <a:r>
-              <a:rPr lang="ru-RU" dirty="0" smtClean="0">
+              <a:rPr lang="ru-RU" sz="2000" dirty="0" smtClean="0">
                 <a:latin typeface="Consolas" panose="020B0609020204030204" pitchFamily="49" charset="0"/>
               </a:rPr>
               <a:t>поколении.</a:t>
             </a:r>
-            <a:endParaRPr lang="ru-RU" dirty="0">
+            <a:endParaRPr lang="ru-RU" sz="2000" dirty="0">
               <a:latin typeface="Consolas" panose="020B0609020204030204" pitchFamily="49" charset="0"/>
             </a:endParaRPr>
           </a:p>
@@ -4228,8 +5477,8 @@
         </p:nvSpPr>
         <p:spPr>
           <a:xfrm>
-            <a:off x="2483768" y="4221088"/>
-            <a:ext cx="6408712" cy="646331"/>
+            <a:off x="2483768" y="4449306"/>
+            <a:ext cx="6408712" cy="707886"/>
           </a:xfrm>
           <a:prstGeom prst="rect">
             <a:avLst/>
@@ -4242,13 +5491,19 @@
           <a:lstStyle/>
           <a:p>
             <a:r>
-              <a:rPr lang="ru-RU" dirty="0" smtClean="0">
+              <a:rPr lang="ru-RU" sz="2000" b="1" dirty="0" smtClean="0">
                 <a:latin typeface="Consolas" panose="020B0609020204030204" pitchFamily="49" charset="0"/>
               </a:rPr>
-              <a:t>3. Живая </a:t>
-            </a:r>
-            <a:r>
-              <a:rPr lang="ru-RU" dirty="0">
+              <a:t>3.</a:t>
+            </a:r>
+            <a:r>
+              <a:rPr lang="ru-RU" sz="2000" dirty="0" smtClean="0">
+                <a:latin typeface="Consolas" panose="020B0609020204030204" pitchFamily="49" charset="0"/>
+              </a:rPr>
+              <a:t> Живая </a:t>
+            </a:r>
+            <a:r>
+              <a:rPr lang="ru-RU" sz="2000" dirty="0">
                 <a:latin typeface="Consolas" panose="020B0609020204030204" pitchFamily="49" charset="0"/>
               </a:rPr>
               <a:t>клетка с более чем тремя соседями умирает от перенаселения.</a:t>
@@ -4264,8 +5519,8 @@
         </p:nvSpPr>
         <p:spPr>
           <a:xfrm>
-            <a:off x="2483768" y="5164414"/>
-            <a:ext cx="6408712" cy="646331"/>
+            <a:off x="2483768" y="5457418"/>
+            <a:ext cx="6408712" cy="707886"/>
           </a:xfrm>
           <a:prstGeom prst="rect">
             <a:avLst/>
@@ -4278,13 +5533,19 @@
           <a:lstStyle/>
           <a:p>
             <a:r>
-              <a:rPr lang="ru-RU" dirty="0" smtClean="0">
+              <a:rPr lang="ru-RU" sz="2000" b="1" dirty="0" smtClean="0">
                 <a:latin typeface="Consolas" panose="020B0609020204030204" pitchFamily="49" charset="0"/>
               </a:rPr>
-              <a:t>4. Мёртвая </a:t>
-            </a:r>
-            <a:r>
-              <a:rPr lang="ru-RU" dirty="0">
+              <a:t>4.</a:t>
+            </a:r>
+            <a:r>
+              <a:rPr lang="ru-RU" sz="2000" dirty="0" smtClean="0">
+                <a:latin typeface="Consolas" panose="020B0609020204030204" pitchFamily="49" charset="0"/>
+              </a:rPr>
+              <a:t> Мёртвая </a:t>
+            </a:r>
+            <a:r>
+              <a:rPr lang="ru-RU" sz="2000" dirty="0">
                 <a:latin typeface="Consolas" panose="020B0609020204030204" pitchFamily="49" charset="0"/>
               </a:rPr>
               <a:t>клетка с тремя живыми соседями становится живой.</a:t>
@@ -4414,7 +5675,7 @@
           <a:lstStyle/>
           <a:p>
             <a:pPr algn="ctr"/>
-            <a:endParaRPr lang="ru-RU"/>
+            <a:endParaRPr lang="ru-RU" dirty="0"/>
           </a:p>
         </p:txBody>
       </p:sp>
@@ -4465,7 +5726,7 @@
           <a:lstStyle/>
           <a:p>
             <a:pPr algn="ctr"/>
-            <a:endParaRPr lang="ru-RU"/>
+            <a:endParaRPr lang="ru-RU" dirty="0"/>
           </a:p>
         </p:txBody>
       </p:sp>
@@ -4516,7 +5777,7 @@
           <a:lstStyle/>
           <a:p>
             <a:pPr algn="ctr"/>
-            <a:endParaRPr lang="ru-RU"/>
+            <a:endParaRPr lang="ru-RU" dirty="0"/>
           </a:p>
         </p:txBody>
       </p:sp>
@@ -4564,7 +5825,7 @@
           <a:lstStyle/>
           <a:p>
             <a:pPr algn="ctr"/>
-            <a:endParaRPr lang="ru-RU"/>
+            <a:endParaRPr lang="ru-RU" dirty="0"/>
           </a:p>
         </p:txBody>
       </p:sp>
@@ -4615,7 +5876,7 @@
           <a:lstStyle/>
           <a:p>
             <a:pPr algn="ctr"/>
-            <a:endParaRPr lang="ru-RU"/>
+            <a:endParaRPr lang="ru-RU" dirty="0"/>
           </a:p>
         </p:txBody>
       </p:sp>
@@ -4666,7 +5927,7 @@
           <a:lstStyle/>
           <a:p>
             <a:pPr algn="ctr"/>
-            <a:endParaRPr lang="ru-RU"/>
+            <a:endParaRPr lang="ru-RU" dirty="0"/>
           </a:p>
         </p:txBody>
       </p:sp>
@@ -4714,7 +5975,7 @@
           <a:lstStyle/>
           <a:p>
             <a:pPr algn="ctr"/>
-            <a:endParaRPr lang="ru-RU"/>
+            <a:endParaRPr lang="ru-RU" dirty="0"/>
           </a:p>
         </p:txBody>
       </p:sp>
@@ -4765,7 +6026,7 @@
           <a:lstStyle/>
           <a:p>
             <a:pPr algn="ctr"/>
-            <a:endParaRPr lang="ru-RU"/>
+            <a:endParaRPr lang="ru-RU" dirty="0"/>
           </a:p>
         </p:txBody>
       </p:sp>
@@ -4813,7 +6074,7 @@
           <a:lstStyle/>
           <a:p>
             <a:pPr algn="ctr"/>
-            <a:endParaRPr lang="ru-RU"/>
+            <a:endParaRPr lang="ru-RU" dirty="0"/>
           </a:p>
         </p:txBody>
       </p:sp>
@@ -5062,7 +6323,7 @@
           <a:lstStyle/>
           <a:p>
             <a:pPr algn="ctr"/>
-            <a:endParaRPr lang="ru-RU"/>
+            <a:endParaRPr lang="ru-RU" dirty="0"/>
           </a:p>
         </p:txBody>
       </p:sp>
@@ -5113,7 +6374,7 @@
           <a:lstStyle/>
           <a:p>
             <a:pPr algn="ctr"/>
-            <a:endParaRPr lang="ru-RU"/>
+            <a:endParaRPr lang="ru-RU" dirty="0"/>
           </a:p>
         </p:txBody>
       </p:sp>
@@ -5164,7 +6425,7 @@
           <a:lstStyle/>
           <a:p>
             <a:pPr algn="ctr"/>
-            <a:endParaRPr lang="ru-RU"/>
+            <a:endParaRPr lang="ru-RU" dirty="0"/>
           </a:p>
         </p:txBody>
       </p:sp>
@@ -5215,7 +6476,7 @@
           <a:lstStyle/>
           <a:p>
             <a:pPr algn="ctr"/>
-            <a:endParaRPr lang="ru-RU"/>
+            <a:endParaRPr lang="ru-RU" dirty="0"/>
           </a:p>
         </p:txBody>
       </p:sp>
@@ -5266,7 +6527,7 @@
           <a:lstStyle/>
           <a:p>
             <a:pPr algn="ctr"/>
-            <a:endParaRPr lang="ru-RU"/>
+            <a:endParaRPr lang="ru-RU" dirty="0"/>
           </a:p>
         </p:txBody>
       </p:sp>
@@ -5317,7 +6578,7 @@
           <a:lstStyle/>
           <a:p>
             <a:pPr algn="ctr"/>
-            <a:endParaRPr lang="ru-RU"/>
+            <a:endParaRPr lang="ru-RU" dirty="0"/>
           </a:p>
         </p:txBody>
       </p:sp>
@@ -5368,7 +6629,7 @@
           <a:lstStyle/>
           <a:p>
             <a:pPr algn="ctr"/>
-            <a:endParaRPr lang="ru-RU"/>
+            <a:endParaRPr lang="ru-RU" dirty="0"/>
           </a:p>
         </p:txBody>
       </p:sp>
@@ -5416,7 +6677,7 @@
           <a:lstStyle/>
           <a:p>
             <a:pPr algn="ctr"/>
-            <a:endParaRPr lang="ru-RU"/>
+            <a:endParaRPr lang="ru-RU" dirty="0"/>
           </a:p>
         </p:txBody>
       </p:sp>
@@ -5467,7 +6728,7 @@
           <a:lstStyle/>
           <a:p>
             <a:pPr algn="ctr"/>
-            <a:endParaRPr lang="ru-RU"/>
+            <a:endParaRPr lang="ru-RU" dirty="0"/>
           </a:p>
         </p:txBody>
       </p:sp>
@@ -5518,7 +6779,7 @@
           <a:lstStyle/>
           <a:p>
             <a:pPr algn="ctr"/>
-            <a:endParaRPr lang="ru-RU"/>
+            <a:endParaRPr lang="ru-RU" dirty="0"/>
           </a:p>
         </p:txBody>
       </p:sp>
@@ -5569,7 +6830,7 @@
           <a:lstStyle/>
           <a:p>
             <a:pPr algn="ctr"/>
-            <a:endParaRPr lang="ru-RU"/>
+            <a:endParaRPr lang="ru-RU" dirty="0"/>
           </a:p>
         </p:txBody>
       </p:sp>
@@ -5620,7 +6881,7 @@
           <a:lstStyle/>
           <a:p>
             <a:pPr algn="ctr"/>
-            <a:endParaRPr lang="ru-RU"/>
+            <a:endParaRPr lang="ru-RU" dirty="0"/>
           </a:p>
         </p:txBody>
       </p:sp>
@@ -5671,7 +6932,7 @@
           <a:lstStyle/>
           <a:p>
             <a:pPr algn="ctr"/>
-            <a:endParaRPr lang="ru-RU"/>
+            <a:endParaRPr lang="ru-RU" dirty="0"/>
           </a:p>
         </p:txBody>
       </p:sp>
@@ -5719,7 +6980,7 @@
           <a:lstStyle/>
           <a:p>
             <a:pPr algn="ctr"/>
-            <a:endParaRPr lang="ru-RU"/>
+            <a:endParaRPr lang="ru-RU" dirty="0"/>
           </a:p>
         </p:txBody>
       </p:sp>
@@ -5770,7 +7031,7 @@
           <a:lstStyle/>
           <a:p>
             <a:pPr algn="ctr"/>
-            <a:endParaRPr lang="ru-RU"/>
+            <a:endParaRPr lang="ru-RU" dirty="0"/>
           </a:p>
         </p:txBody>
       </p:sp>
@@ -5821,7 +7082,7 @@
           <a:lstStyle/>
           <a:p>
             <a:pPr algn="ctr"/>
-            <a:endParaRPr lang="ru-RU"/>
+            <a:endParaRPr lang="ru-RU" dirty="0"/>
           </a:p>
         </p:txBody>
       </p:sp>
@@ -5872,7 +7133,7 @@
           <a:lstStyle/>
           <a:p>
             <a:pPr algn="ctr"/>
-            <a:endParaRPr lang="ru-RU"/>
+            <a:endParaRPr lang="ru-RU" dirty="0"/>
           </a:p>
         </p:txBody>
       </p:sp>
@@ -5923,7 +7184,7 @@
           <a:lstStyle/>
           <a:p>
             <a:pPr algn="ctr"/>
-            <a:endParaRPr lang="ru-RU"/>
+            <a:endParaRPr lang="ru-RU" dirty="0"/>
           </a:p>
         </p:txBody>
       </p:sp>
@@ -5974,7 +7235,7 @@
           <a:lstStyle/>
           <a:p>
             <a:pPr algn="ctr"/>
-            <a:endParaRPr lang="ru-RU"/>
+            <a:endParaRPr lang="ru-RU" dirty="0"/>
           </a:p>
         </p:txBody>
       </p:sp>
@@ -6025,7 +7286,7 @@
           <a:lstStyle/>
           <a:p>
             <a:pPr algn="ctr"/>
-            <a:endParaRPr lang="ru-RU"/>
+            <a:endParaRPr lang="ru-RU" dirty="0"/>
           </a:p>
         </p:txBody>
       </p:sp>
@@ -6076,7 +7337,7 @@
           <a:lstStyle/>
           <a:p>
             <a:pPr algn="ctr"/>
-            <a:endParaRPr lang="ru-RU"/>
+            <a:endParaRPr lang="ru-RU" dirty="0"/>
           </a:p>
         </p:txBody>
       </p:sp>
@@ -6127,7 +7388,7 @@
           <a:lstStyle/>
           <a:p>
             <a:pPr algn="ctr"/>
-            <a:endParaRPr lang="ru-RU"/>
+            <a:endParaRPr lang="ru-RU" dirty="0"/>
           </a:p>
         </p:txBody>
       </p:sp>
@@ -6178,7 +7439,7 @@
           <a:lstStyle/>
           <a:p>
             <a:pPr algn="ctr"/>
-            <a:endParaRPr lang="ru-RU"/>
+            <a:endParaRPr lang="ru-RU" dirty="0"/>
           </a:p>
         </p:txBody>
       </p:sp>
@@ -6229,7 +7490,7 @@
           <a:lstStyle/>
           <a:p>
             <a:pPr algn="ctr"/>
-            <a:endParaRPr lang="ru-RU"/>
+            <a:endParaRPr lang="ru-RU" dirty="0"/>
           </a:p>
         </p:txBody>
       </p:sp>
@@ -6280,7 +7541,7 @@
           <a:lstStyle/>
           <a:p>
             <a:pPr algn="ctr"/>
-            <a:endParaRPr lang="ru-RU"/>
+            <a:endParaRPr lang="ru-RU" dirty="0"/>
           </a:p>
         </p:txBody>
       </p:sp>
@@ -6331,7 +7592,7 @@
           <a:lstStyle/>
           <a:p>
             <a:pPr algn="ctr"/>
-            <a:endParaRPr lang="ru-RU"/>
+            <a:endParaRPr lang="ru-RU" dirty="0"/>
           </a:p>
         </p:txBody>
       </p:sp>
@@ -6382,7 +7643,7 @@
           <a:lstStyle/>
           <a:p>
             <a:pPr algn="ctr"/>
-            <a:endParaRPr lang="ru-RU"/>
+            <a:endParaRPr lang="ru-RU" dirty="0"/>
           </a:p>
         </p:txBody>
       </p:sp>
@@ -6433,7 +7694,7 @@
           <a:lstStyle/>
           <a:p>
             <a:pPr algn="ctr"/>
-            <a:endParaRPr lang="ru-RU"/>
+            <a:endParaRPr lang="ru-RU" dirty="0"/>
           </a:p>
         </p:txBody>
       </p:sp>
@@ -6484,7 +7745,7 @@
           <a:lstStyle/>
           <a:p>
             <a:pPr algn="ctr"/>
-            <a:endParaRPr lang="ru-RU"/>
+            <a:endParaRPr lang="ru-RU" dirty="0"/>
           </a:p>
         </p:txBody>
       </p:sp>
@@ -6535,7 +7796,7 @@
           <a:lstStyle/>
           <a:p>
             <a:pPr algn="ctr"/>
-            <a:endParaRPr lang="ru-RU"/>
+            <a:endParaRPr lang="ru-RU" dirty="0"/>
           </a:p>
         </p:txBody>
       </p:sp>
@@ -6583,7 +7844,7 @@
           <a:lstStyle/>
           <a:p>
             <a:pPr algn="ctr"/>
-            <a:endParaRPr lang="ru-RU"/>
+            <a:endParaRPr lang="ru-RU" dirty="0"/>
           </a:p>
         </p:txBody>
       </p:sp>
@@ -6631,7 +7892,7 @@
           <a:lstStyle/>
           <a:p>
             <a:pPr algn="ctr"/>
-            <a:endParaRPr lang="ru-RU"/>
+            <a:endParaRPr lang="ru-RU" dirty="0"/>
           </a:p>
         </p:txBody>
       </p:sp>
@@ -6679,7 +7940,7 @@
           <a:lstStyle/>
           <a:p>
             <a:pPr algn="ctr"/>
-            <a:endParaRPr lang="ru-RU"/>
+            <a:endParaRPr lang="ru-RU" dirty="0"/>
           </a:p>
         </p:txBody>
       </p:sp>
@@ -6730,7 +7991,7 @@
           <a:lstStyle/>
           <a:p>
             <a:pPr algn="ctr"/>
-            <a:endParaRPr lang="ru-RU"/>
+            <a:endParaRPr lang="ru-RU" dirty="0"/>
           </a:p>
         </p:txBody>
       </p:sp>
@@ -6781,7 +8042,7 @@
           <a:lstStyle/>
           <a:p>
             <a:pPr algn="ctr"/>
-            <a:endParaRPr lang="ru-RU"/>
+            <a:endParaRPr lang="ru-RU" dirty="0"/>
           </a:p>
         </p:txBody>
       </p:sp>
@@ -6832,7 +8093,7 @@
           <a:lstStyle/>
           <a:p>
             <a:pPr algn="ctr"/>
-            <a:endParaRPr lang="ru-RU"/>
+            <a:endParaRPr lang="ru-RU" dirty="0"/>
           </a:p>
         </p:txBody>
       </p:sp>
@@ -6883,7 +8144,7 @@
           <a:lstStyle/>
           <a:p>
             <a:pPr algn="ctr"/>
-            <a:endParaRPr lang="ru-RU"/>
+            <a:endParaRPr lang="ru-RU" dirty="0"/>
           </a:p>
         </p:txBody>
       </p:sp>
@@ -6934,7 +8195,7 @@
           <a:lstStyle/>
           <a:p>
             <a:pPr algn="ctr"/>
-            <a:endParaRPr lang="ru-RU"/>
+            <a:endParaRPr lang="ru-RU" dirty="0"/>
           </a:p>
         </p:txBody>
       </p:sp>
@@ -6985,7 +8246,7 @@
           <a:lstStyle/>
           <a:p>
             <a:pPr algn="ctr"/>
-            <a:endParaRPr lang="ru-RU"/>
+            <a:endParaRPr lang="ru-RU" dirty="0"/>
           </a:p>
         </p:txBody>
       </p:sp>
@@ -7036,7 +8297,7 @@
           <a:lstStyle/>
           <a:p>
             <a:pPr algn="ctr"/>
-            <a:endParaRPr lang="ru-RU"/>
+            <a:endParaRPr lang="ru-RU" dirty="0"/>
           </a:p>
         </p:txBody>
       </p:sp>
@@ -7087,7 +8348,7 @@
           <a:lstStyle/>
           <a:p>
             <a:pPr algn="ctr"/>
-            <a:endParaRPr lang="ru-RU"/>
+            <a:endParaRPr lang="ru-RU" dirty="0"/>
           </a:p>
         </p:txBody>
       </p:sp>
@@ -7138,7 +8399,7 @@
           <a:lstStyle/>
           <a:p>
             <a:pPr algn="ctr"/>
-            <a:endParaRPr lang="ru-RU"/>
+            <a:endParaRPr lang="ru-RU" dirty="0"/>
           </a:p>
         </p:txBody>
       </p:sp>
@@ -7189,7 +8450,7 @@
           <a:lstStyle/>
           <a:p>
             <a:pPr algn="ctr"/>
-            <a:endParaRPr lang="ru-RU"/>
+            <a:endParaRPr lang="ru-RU" dirty="0"/>
           </a:p>
         </p:txBody>
       </p:sp>
@@ -7240,7 +8501,7 @@
           <a:lstStyle/>
           <a:p>
             <a:pPr algn="ctr"/>
-            <a:endParaRPr lang="ru-RU"/>
+            <a:endParaRPr lang="ru-RU" dirty="0"/>
           </a:p>
         </p:txBody>
       </p:sp>
@@ -7291,7 +8552,7 @@
           <a:lstStyle/>
           <a:p>
             <a:pPr algn="ctr"/>
-            <a:endParaRPr lang="ru-RU"/>
+            <a:endParaRPr lang="ru-RU" dirty="0"/>
           </a:p>
         </p:txBody>
       </p:sp>
@@ -7342,7 +8603,7 @@
           <a:lstStyle/>
           <a:p>
             <a:pPr algn="ctr"/>
-            <a:endParaRPr lang="ru-RU"/>
+            <a:endParaRPr lang="ru-RU" dirty="0"/>
           </a:p>
         </p:txBody>
       </p:sp>
@@ -7393,7 +8654,7 @@
           <a:lstStyle/>
           <a:p>
             <a:pPr algn="ctr"/>
-            <a:endParaRPr lang="ru-RU"/>
+            <a:endParaRPr lang="ru-RU" dirty="0"/>
           </a:p>
         </p:txBody>
       </p:sp>
@@ -7441,7 +8702,7 @@
           <a:lstStyle/>
           <a:p>
             <a:pPr algn="ctr"/>
-            <a:endParaRPr lang="ru-RU"/>
+            <a:endParaRPr lang="ru-RU" dirty="0"/>
           </a:p>
         </p:txBody>
       </p:sp>
@@ -7492,7 +8753,7 @@
           <a:lstStyle/>
           <a:p>
             <a:pPr algn="ctr"/>
-            <a:endParaRPr lang="ru-RU"/>
+            <a:endParaRPr lang="ru-RU" dirty="0"/>
           </a:p>
         </p:txBody>
       </p:sp>
@@ -7540,7 +8801,7 @@
           <a:lstStyle/>
           <a:p>
             <a:pPr algn="ctr"/>
-            <a:endParaRPr lang="ru-RU"/>
+            <a:endParaRPr lang="ru-RU" dirty="0"/>
           </a:p>
         </p:txBody>
       </p:sp>
@@ -7591,7 +8852,7 @@
           <a:lstStyle/>
           <a:p>
             <a:pPr algn="ctr"/>
-            <a:endParaRPr lang="ru-RU"/>
+            <a:endParaRPr lang="ru-RU" dirty="0"/>
           </a:p>
         </p:txBody>
       </p:sp>
@@ -7642,7 +8903,7 @@
           <a:lstStyle/>
           <a:p>
             <a:pPr algn="ctr"/>
-            <a:endParaRPr lang="ru-RU"/>
+            <a:endParaRPr lang="ru-RU" dirty="0"/>
           </a:p>
         </p:txBody>
       </p:sp>
@@ -7693,7 +8954,7 @@
           <a:lstStyle/>
           <a:p>
             <a:pPr algn="ctr"/>
-            <a:endParaRPr lang="ru-RU"/>
+            <a:endParaRPr lang="ru-RU" dirty="0"/>
           </a:p>
         </p:txBody>
       </p:sp>
@@ -7744,7 +9005,7 @@
           <a:lstStyle/>
           <a:p>
             <a:pPr algn="ctr"/>
-            <a:endParaRPr lang="ru-RU"/>
+            <a:endParaRPr lang="ru-RU" dirty="0"/>
           </a:p>
         </p:txBody>
       </p:sp>
@@ -7795,7 +9056,7 @@
           <a:lstStyle/>
           <a:p>
             <a:pPr algn="ctr"/>
-            <a:endParaRPr lang="ru-RU"/>
+            <a:endParaRPr lang="ru-RU" dirty="0"/>
           </a:p>
         </p:txBody>
       </p:sp>
@@ -7846,7 +9107,7 @@
           <a:lstStyle/>
           <a:p>
             <a:pPr algn="ctr"/>
-            <a:endParaRPr lang="ru-RU"/>
+            <a:endParaRPr lang="ru-RU" dirty="0"/>
           </a:p>
         </p:txBody>
       </p:sp>
@@ -7894,7 +9155,7 @@
           <a:lstStyle/>
           <a:p>
             <a:pPr algn="ctr"/>
-            <a:endParaRPr lang="ru-RU"/>
+            <a:endParaRPr lang="ru-RU" dirty="0"/>
           </a:p>
         </p:txBody>
       </p:sp>
@@ -7942,7 +9203,7 @@
           <a:lstStyle/>
           <a:p>
             <a:pPr algn="ctr"/>
-            <a:endParaRPr lang="ru-RU"/>
+            <a:endParaRPr lang="ru-RU" dirty="0"/>
           </a:p>
         </p:txBody>
       </p:sp>
@@ -7993,7 +9254,7 @@
           <a:lstStyle/>
           <a:p>
             <a:pPr algn="ctr"/>
-            <a:endParaRPr lang="ru-RU"/>
+            <a:endParaRPr lang="ru-RU" dirty="0"/>
           </a:p>
         </p:txBody>
       </p:sp>
@@ -8044,7 +9305,7 @@
           <a:lstStyle/>
           <a:p>
             <a:pPr algn="ctr"/>
-            <a:endParaRPr lang="ru-RU"/>
+            <a:endParaRPr lang="ru-RU" dirty="0"/>
           </a:p>
         </p:txBody>
       </p:sp>
@@ -8095,7 +9356,7 @@
           <a:lstStyle/>
           <a:p>
             <a:pPr algn="ctr"/>
-            <a:endParaRPr lang="ru-RU"/>
+            <a:endParaRPr lang="ru-RU" dirty="0"/>
           </a:p>
         </p:txBody>
       </p:sp>
@@ -8143,7 +9404,7 @@
           <a:lstStyle/>
           <a:p>
             <a:pPr algn="ctr"/>
-            <a:endParaRPr lang="ru-RU"/>
+            <a:endParaRPr lang="ru-RU" dirty="0"/>
           </a:p>
         </p:txBody>
       </p:sp>
@@ -8194,7 +9455,7 @@
           <a:lstStyle/>
           <a:p>
             <a:pPr algn="ctr"/>
-            <a:endParaRPr lang="ru-RU"/>
+            <a:endParaRPr lang="ru-RU" dirty="0"/>
           </a:p>
         </p:txBody>
       </p:sp>
@@ -8245,7 +9506,7 @@
           <a:lstStyle/>
           <a:p>
             <a:pPr algn="ctr"/>
-            <a:endParaRPr lang="ru-RU"/>
+            <a:endParaRPr lang="ru-RU" dirty="0"/>
           </a:p>
         </p:txBody>
       </p:sp>
@@ -8729,7 +9990,7 @@
         <p:spPr>
           <a:xfrm>
             <a:off x="2428700" y="2204864"/>
-            <a:ext cx="6238122" cy="646331"/>
+            <a:ext cx="6238122" cy="707886"/>
           </a:xfrm>
           <a:prstGeom prst="rect">
             <a:avLst/>
@@ -8743,24 +10004,24 @@
           <a:lstStyle/>
           <a:p>
             <a:r>
-              <a:rPr lang="en-US" dirty="0" smtClean="0">
+              <a:rPr lang="en-US" sz="2000" dirty="0" smtClean="0">
                 <a:latin typeface="Consolas" panose="020B0609020204030204" pitchFamily="49" charset="0"/>
               </a:rPr>
               <a:t>&gt; </a:t>
             </a:r>
             <a:r>
-              <a:rPr lang="ru-RU" dirty="0" smtClean="0">
+              <a:rPr lang="ru-RU" sz="2000" dirty="0" smtClean="0">
                 <a:latin typeface="Consolas" panose="020B0609020204030204" pitchFamily="49" charset="0"/>
               </a:rPr>
               <a:t>Параллельно вычисляет новое состояние всех клеток матрицы 16х32</a:t>
             </a:r>
             <a:r>
-              <a:rPr lang="en-US" dirty="0">
+              <a:rPr lang="en-US" sz="2000" dirty="0">
                 <a:latin typeface="Consolas" panose="020B0609020204030204" pitchFamily="49" charset="0"/>
               </a:rPr>
               <a:t>.</a:t>
             </a:r>
-            <a:endParaRPr lang="ru-RU" dirty="0">
+            <a:endParaRPr lang="ru-RU" sz="2000" dirty="0">
               <a:latin typeface="Consolas" panose="020B0609020204030204" pitchFamily="49" charset="0"/>
             </a:endParaRPr>
           </a:p>
@@ -8988,6 +10249,300 @@
           </a:p>
         </p:txBody>
       </p:sp>
+      <p:pic>
+        <p:nvPicPr>
+          <p:cNvPr id="4" name="Рисунок 3"/>
+          <p:cNvPicPr>
+            <a:picLocks noChangeAspect="1"/>
+          </p:cNvPicPr>
+          <p:nvPr/>
+        </p:nvPicPr>
+        <p:blipFill>
+          <a:blip r:embed="rId4">
+            <a:extLst>
+              <a:ext uri="{28A0092B-C50C-407E-A947-70E740481C1C}">
+                <a14:useLocalDpi xmlns:a14="http://schemas.microsoft.com/office/drawing/2010/main" val="0"/>
+              </a:ext>
+            </a:extLst>
+          </a:blip>
+          <a:stretch>
+            <a:fillRect/>
+          </a:stretch>
+        </p:blipFill>
+        <p:spPr>
+          <a:xfrm>
+            <a:off x="2469199" y="2564904"/>
+            <a:ext cx="3149282" cy="3797915"/>
+          </a:xfrm>
+          <a:prstGeom prst="rect">
+            <a:avLst/>
+          </a:prstGeom>
+        </p:spPr>
+      </p:pic>
+      <p:sp>
+        <p:nvSpPr>
+          <p:cNvPr id="5" name="Овал 4"/>
+          <p:cNvSpPr/>
+          <p:nvPr/>
+        </p:nvSpPr>
+        <p:spPr>
+          <a:xfrm>
+            <a:off x="5796136" y="5229200"/>
+            <a:ext cx="432048" cy="432048"/>
+          </a:xfrm>
+          <a:prstGeom prst="ellipse">
+            <a:avLst/>
+          </a:prstGeom>
+          <a:solidFill>
+            <a:srgbClr val="05FF1D"/>
+          </a:solidFill>
+          <a:ln>
+            <a:solidFill>
+              <a:srgbClr val="0900C2"/>
+            </a:solidFill>
+          </a:ln>
+        </p:spPr>
+        <p:style>
+          <a:lnRef idx="2">
+            <a:schemeClr val="accent1">
+              <a:shade val="50000"/>
+            </a:schemeClr>
+          </a:lnRef>
+          <a:fillRef idx="1">
+            <a:schemeClr val="accent1"/>
+          </a:fillRef>
+          <a:effectRef idx="0">
+            <a:schemeClr val="accent1"/>
+          </a:effectRef>
+          <a:fontRef idx="minor">
+            <a:schemeClr val="lt1"/>
+          </a:fontRef>
+        </p:style>
+        <p:txBody>
+          <a:bodyPr rtlCol="0" anchor="ctr"/>
+          <a:lstStyle/>
+          <a:p>
+            <a:pPr algn="ctr"/>
+            <a:endParaRPr lang="ru-RU" dirty="0"/>
+          </a:p>
+        </p:txBody>
+      </p:sp>
+      <p:sp>
+        <p:nvSpPr>
+          <p:cNvPr id="6" name="Овал 5"/>
+          <p:cNvSpPr/>
+          <p:nvPr/>
+        </p:nvSpPr>
+        <p:spPr>
+          <a:xfrm>
+            <a:off x="5796136" y="4040198"/>
+            <a:ext cx="432048" cy="432048"/>
+          </a:xfrm>
+          <a:prstGeom prst="ellipse">
+            <a:avLst/>
+          </a:prstGeom>
+          <a:solidFill>
+            <a:srgbClr val="FFFF00"/>
+          </a:solidFill>
+          <a:ln>
+            <a:solidFill>
+              <a:srgbClr val="0900C2"/>
+            </a:solidFill>
+          </a:ln>
+        </p:spPr>
+        <p:style>
+          <a:lnRef idx="2">
+            <a:schemeClr val="accent1">
+              <a:shade val="50000"/>
+            </a:schemeClr>
+          </a:lnRef>
+          <a:fillRef idx="1">
+            <a:schemeClr val="accent1"/>
+          </a:fillRef>
+          <a:effectRef idx="0">
+            <a:schemeClr val="accent1"/>
+          </a:effectRef>
+          <a:fontRef idx="minor">
+            <a:schemeClr val="lt1"/>
+          </a:fontRef>
+        </p:style>
+        <p:txBody>
+          <a:bodyPr rtlCol="0" anchor="ctr"/>
+          <a:lstStyle/>
+          <a:p>
+            <a:pPr algn="ctr"/>
+            <a:endParaRPr lang="ru-RU" dirty="0"/>
+          </a:p>
+        </p:txBody>
+      </p:sp>
+      <p:sp>
+        <p:nvSpPr>
+          <p:cNvPr id="7" name="Овал 6"/>
+          <p:cNvSpPr/>
+          <p:nvPr/>
+        </p:nvSpPr>
+        <p:spPr>
+          <a:xfrm>
+            <a:off x="5796136" y="2868653"/>
+            <a:ext cx="432048" cy="432048"/>
+          </a:xfrm>
+          <a:prstGeom prst="ellipse">
+            <a:avLst/>
+          </a:prstGeom>
+          <a:solidFill>
+            <a:srgbClr val="FF0000"/>
+          </a:solidFill>
+          <a:ln>
+            <a:solidFill>
+              <a:srgbClr val="0900C2"/>
+            </a:solidFill>
+          </a:ln>
+        </p:spPr>
+        <p:style>
+          <a:lnRef idx="2">
+            <a:schemeClr val="accent1">
+              <a:shade val="50000"/>
+            </a:schemeClr>
+          </a:lnRef>
+          <a:fillRef idx="1">
+            <a:schemeClr val="accent1"/>
+          </a:fillRef>
+          <a:effectRef idx="0">
+            <a:schemeClr val="accent1"/>
+          </a:effectRef>
+          <a:fontRef idx="minor">
+            <a:schemeClr val="lt1"/>
+          </a:fontRef>
+        </p:style>
+        <p:txBody>
+          <a:bodyPr rtlCol="0" anchor="ctr"/>
+          <a:lstStyle/>
+          <a:p>
+            <a:pPr algn="ctr"/>
+            <a:endParaRPr lang="ru-RU" dirty="0"/>
+          </a:p>
+        </p:txBody>
+      </p:sp>
+      <p:sp>
+        <p:nvSpPr>
+          <p:cNvPr id="8" name="TextBox 7"/>
+          <p:cNvSpPr txBox="1"/>
+          <p:nvPr/>
+        </p:nvSpPr>
+        <p:spPr>
+          <a:xfrm>
+            <a:off x="6372200" y="2636912"/>
+            <a:ext cx="2376264" cy="1015663"/>
+          </a:xfrm>
+          <a:prstGeom prst="rect">
+            <a:avLst/>
+          </a:prstGeom>
+          <a:noFill/>
+        </p:spPr>
+        <p:txBody>
+          <a:bodyPr wrap="square" rtlCol="0">
+            <a:spAutoFit/>
+          </a:bodyPr>
+          <a:lstStyle/>
+          <a:p>
+            <a:r>
+              <a:rPr lang="en-US" sz="2000" dirty="0" smtClean="0">
+                <a:latin typeface="Consolas" panose="020B0609020204030204" pitchFamily="49" charset="0"/>
+              </a:rPr>
+              <a:t>&gt; </a:t>
+            </a:r>
+            <a:r>
+              <a:rPr lang="ru-RU" sz="2000" dirty="0" smtClean="0">
+                <a:latin typeface="Consolas" panose="020B0609020204030204" pitchFamily="49" charset="0"/>
+              </a:rPr>
+              <a:t>Непрерывное      отображение новых поколений</a:t>
+            </a:r>
+            <a:endParaRPr lang="ru-RU" sz="2000" dirty="0">
+              <a:latin typeface="Consolas" panose="020B0609020204030204" pitchFamily="49" charset="0"/>
+            </a:endParaRPr>
+          </a:p>
+        </p:txBody>
+      </p:sp>
+      <p:sp>
+        <p:nvSpPr>
+          <p:cNvPr id="9" name="TextBox 8"/>
+          <p:cNvSpPr txBox="1"/>
+          <p:nvPr/>
+        </p:nvSpPr>
+        <p:spPr>
+          <a:xfrm>
+            <a:off x="6372200" y="3939699"/>
+            <a:ext cx="2376264" cy="707886"/>
+          </a:xfrm>
+          <a:prstGeom prst="rect">
+            <a:avLst/>
+          </a:prstGeom>
+          <a:noFill/>
+        </p:spPr>
+        <p:txBody>
+          <a:bodyPr wrap="square" rtlCol="0">
+            <a:spAutoFit/>
+          </a:bodyPr>
+          <a:lstStyle/>
+          <a:p>
+            <a:r>
+              <a:rPr lang="en-US" sz="2000" dirty="0" smtClean="0">
+                <a:latin typeface="Consolas" panose="020B0609020204030204" pitchFamily="49" charset="0"/>
+              </a:rPr>
+              <a:t>&gt; </a:t>
+            </a:r>
+            <a:r>
+              <a:rPr lang="ru-RU" sz="2000" dirty="0" smtClean="0">
+                <a:latin typeface="Consolas" panose="020B0609020204030204" pitchFamily="49" charset="0"/>
+              </a:rPr>
+              <a:t>Выполняется прерывание</a:t>
+            </a:r>
+            <a:endParaRPr lang="ru-RU" sz="2000" dirty="0">
+              <a:latin typeface="Consolas" panose="020B0609020204030204" pitchFamily="49" charset="0"/>
+            </a:endParaRPr>
+          </a:p>
+        </p:txBody>
+      </p:sp>
+      <p:sp>
+        <p:nvSpPr>
+          <p:cNvPr id="10" name="TextBox 9"/>
+          <p:cNvSpPr txBox="1"/>
+          <p:nvPr/>
+        </p:nvSpPr>
+        <p:spPr>
+          <a:xfrm>
+            <a:off x="6372200" y="5085184"/>
+            <a:ext cx="2627784" cy="1015663"/>
+          </a:xfrm>
+          <a:prstGeom prst="rect">
+            <a:avLst/>
+          </a:prstGeom>
+          <a:noFill/>
+        </p:spPr>
+        <p:txBody>
+          <a:bodyPr wrap="square" rtlCol="0">
+            <a:spAutoFit/>
+          </a:bodyPr>
+          <a:lstStyle/>
+          <a:p>
+            <a:r>
+              <a:rPr lang="en-US" sz="2000" dirty="0" smtClean="0">
+                <a:latin typeface="Consolas" panose="020B0609020204030204" pitchFamily="49" charset="0"/>
+              </a:rPr>
+              <a:t>&gt; </a:t>
+            </a:r>
+            <a:r>
+              <a:rPr lang="ru-RU" sz="2000" dirty="0" smtClean="0">
+                <a:latin typeface="Consolas" panose="020B0609020204030204" pitchFamily="49" charset="0"/>
+              </a:rPr>
+              <a:t>Режим настройки текущего состояния</a:t>
+            </a:r>
+            <a:endParaRPr lang="ru-RU" sz="2000" dirty="0">
+              <a:latin typeface="Consolas" panose="020B0609020204030204" pitchFamily="49" charset="0"/>
+            </a:endParaRPr>
+          </a:p>
+        </p:txBody>
+      </p:sp>
     </p:spTree>
     <p:extLst>
       <p:ext uri="{BB962C8B-B14F-4D97-AF65-F5344CB8AC3E}">
@@ -9118,8 +10673,8 @@
         </p:blipFill>
         <p:spPr>
           <a:xfrm>
-            <a:off x="5724128" y="4293095"/>
-            <a:ext cx="3174521" cy="2351127"/>
+            <a:off x="6084168" y="4318234"/>
+            <a:ext cx="2882842" cy="2135102"/>
           </a:xfrm>
           <a:prstGeom prst="rect">
             <a:avLst/>
@@ -9149,7 +10704,7 @@
           <p:nvPr/>
         </p:nvPicPr>
         <p:blipFill>
-          <a:blip r:embed="rId5">
+          <a:blip r:embed="rId5" cstate="print">
             <a:extLst>
               <a:ext uri="{28A0092B-C50C-407E-A947-70E740481C1C}">
                 <a14:useLocalDpi xmlns:a14="http://schemas.microsoft.com/office/drawing/2010/main" val="0"/>
@@ -9162,8 +10717,8 @@
         </p:blipFill>
         <p:spPr>
           <a:xfrm>
-            <a:off x="5868144" y="5013176"/>
-            <a:ext cx="1075592" cy="1071183"/>
+            <a:off x="6153417" y="5038314"/>
+            <a:ext cx="858679" cy="855159"/>
           </a:xfrm>
           <a:prstGeom prst="rect">
             <a:avLst/>
@@ -9178,8 +10733,8 @@
         </p:nvCxnSpPr>
         <p:spPr>
           <a:xfrm flipH="1">
-            <a:off x="6943736" y="5085184"/>
-            <a:ext cx="326300" cy="463583"/>
+            <a:off x="7012097" y="5038314"/>
+            <a:ext cx="436576" cy="319567"/>
           </a:xfrm>
           <a:prstGeom prst="straightConnector1">
             <a:avLst/>
@@ -9206,10 +10761,362 @@
           </a:fontRef>
         </p:style>
       </p:cxnSp>
+      <p:sp>
+        <p:nvSpPr>
+          <p:cNvPr id="6" name="TextBox 5"/>
+          <p:cNvSpPr txBox="1"/>
+          <p:nvPr/>
+        </p:nvSpPr>
+        <p:spPr>
+          <a:xfrm>
+            <a:off x="2339752" y="2132856"/>
+            <a:ext cx="6469949" cy="1938992"/>
+          </a:xfrm>
+          <a:prstGeom prst="rect">
+            <a:avLst/>
+          </a:prstGeom>
+          <a:noFill/>
+        </p:spPr>
+        <p:txBody>
+          <a:bodyPr wrap="square" rtlCol="0">
+            <a:spAutoFit/>
+          </a:bodyPr>
+          <a:lstStyle/>
+          <a:p>
+            <a:r>
+              <a:rPr lang="en-US" sz="2400" dirty="0" smtClean="0">
+                <a:latin typeface="Consolas" panose="020B0609020204030204" pitchFamily="49" charset="0"/>
+              </a:rPr>
+              <a:t>&gt;</a:t>
+            </a:r>
+            <a:r>
+              <a:rPr lang="ru-RU" sz="2400" dirty="0" smtClean="0">
+                <a:latin typeface="Consolas" panose="020B0609020204030204" pitchFamily="49" charset="0"/>
+              </a:rPr>
+              <a:t> Принимает сигналы с кнопок, вызывая необходимые прерывания.</a:t>
+            </a:r>
+          </a:p>
+          <a:p>
+            <a:endParaRPr lang="ru-RU" sz="2400" dirty="0" smtClean="0">
+              <a:latin typeface="Consolas" panose="020B0609020204030204" pitchFamily="49" charset="0"/>
+            </a:endParaRPr>
+          </a:p>
+          <a:p>
+            <a:r>
+              <a:rPr lang="en-US" sz="2400" dirty="0">
+                <a:latin typeface="Consolas" panose="020B0609020204030204" pitchFamily="49" charset="0"/>
+              </a:rPr>
+              <a:t>&gt;</a:t>
+            </a:r>
+            <a:r>
+              <a:rPr lang="ru-RU" sz="2400" dirty="0">
+                <a:latin typeface="Consolas" panose="020B0609020204030204" pitchFamily="49" charset="0"/>
+              </a:rPr>
+              <a:t> </a:t>
+            </a:r>
+            <a:r>
+              <a:rPr lang="ru-RU" sz="2400" dirty="0" smtClean="0">
+                <a:latin typeface="Consolas" panose="020B0609020204030204" pitchFamily="49" charset="0"/>
+              </a:rPr>
+              <a:t>Манипулирует адресами и битовой маской.</a:t>
+            </a:r>
+            <a:endParaRPr lang="ru-RU" sz="2400" dirty="0">
+              <a:latin typeface="Consolas" panose="020B0609020204030204" pitchFamily="49" charset="0"/>
+            </a:endParaRPr>
+          </a:p>
+        </p:txBody>
+      </p:sp>
+      <p:sp>
+        <p:nvSpPr>
+          <p:cNvPr id="8" name="TextBox 7"/>
+          <p:cNvSpPr txBox="1"/>
+          <p:nvPr/>
+        </p:nvSpPr>
+        <p:spPr>
+          <a:xfrm>
+            <a:off x="2339752" y="4289028"/>
+            <a:ext cx="3595015" cy="1569660"/>
+          </a:xfrm>
+          <a:prstGeom prst="rect">
+            <a:avLst/>
+          </a:prstGeom>
+          <a:noFill/>
+        </p:spPr>
+        <p:txBody>
+          <a:bodyPr wrap="square" rtlCol="0">
+            <a:spAutoFit/>
+          </a:bodyPr>
+          <a:lstStyle/>
+          <a:p>
+            <a:r>
+              <a:rPr lang="en-US" sz="2400" dirty="0">
+                <a:latin typeface="Consolas" panose="020B0609020204030204" pitchFamily="49" charset="0"/>
+              </a:rPr>
+              <a:t>&gt;</a:t>
+            </a:r>
+            <a:r>
+              <a:rPr lang="ru-RU" sz="2400" dirty="0">
+                <a:latin typeface="Consolas" panose="020B0609020204030204" pitchFamily="49" charset="0"/>
+              </a:rPr>
+              <a:t> Управляет флагами для индикаторов и обновления состояния матрицы.</a:t>
+            </a:r>
+            <a:endParaRPr lang="ru-RU" sz="2400" dirty="0">
+              <a:latin typeface="Consolas" panose="020B0609020204030204" pitchFamily="49" charset="0"/>
+            </a:endParaRPr>
+          </a:p>
+        </p:txBody>
+      </p:sp>
     </p:spTree>
     <p:extLst>
       <p:ext uri="{BB962C8B-B14F-4D97-AF65-F5344CB8AC3E}">
         <p14:creationId xmlns:p14="http://schemas.microsoft.com/office/powerpoint/2010/main" val="657996477"/>
+      </p:ext>
+    </p:extLst>
+  </p:cSld>
+  <p:clrMapOvr>
+    <a:masterClrMapping/>
+  </p:clrMapOvr>
+  <mc:AlternateContent xmlns:mc="http://schemas.openxmlformats.org/markup-compatibility/2006" xmlns:p14="http://schemas.microsoft.com/office/powerpoint/2010/main">
+    <mc:Choice Requires="p14">
+      <p:transition p14:dur="0"/>
+    </mc:Choice>
+    <mc:Fallback xmlns="">
+      <p:transition/>
+    </mc:Fallback>
+  </mc:AlternateContent>
+  <p:timing>
+    <p:tnLst>
+      <p:par>
+        <p:cTn id="1" dur="indefinite" restart="never" nodeType="tmRoot"/>
+      </p:par>
+    </p:tnLst>
+  </p:timing>
+</p:sld>
+</file>
+
+<file path=ppt/slides/slide9.xml><?xml version="1.0" encoding="utf-8"?>
+<p:sld xmlns:a="http://schemas.openxmlformats.org/drawingml/2006/main" xmlns:r="http://schemas.openxmlformats.org/officeDocument/2006/relationships" xmlns:p="http://schemas.openxmlformats.org/presentationml/2006/main">
+  <p:cSld>
+    <p:spTree>
+      <p:nvGrpSpPr>
+        <p:cNvPr id="1" name=""/>
+        <p:cNvGrpSpPr/>
+        <p:nvPr/>
+      </p:nvGrpSpPr>
+      <p:grpSpPr>
+        <a:xfrm>
+          <a:off x="0" y="0"/>
+          <a:ext cx="0" cy="0"/>
+          <a:chOff x="0" y="0"/>
+          <a:chExt cx="0" cy="0"/>
+        </a:xfrm>
+      </p:grpSpPr>
+      <p:pic>
+        <p:nvPicPr>
+          <p:cNvPr id="2" name="Рисунок 1"/>
+          <p:cNvPicPr>
+            <a:picLocks noChangeAspect="1"/>
+          </p:cNvPicPr>
+          <p:nvPr/>
+        </p:nvPicPr>
+        <p:blipFill>
+          <a:blip r:embed="rId3" cstate="print">
+            <a:extLst>
+              <a:ext uri="{28A0092B-C50C-407E-A947-70E740481C1C}">
+                <a14:useLocalDpi xmlns:a14="http://schemas.microsoft.com/office/drawing/2010/main" val="0"/>
+              </a:ext>
+            </a:extLst>
+          </a:blip>
+          <a:stretch>
+            <a:fillRect/>
+          </a:stretch>
+        </p:blipFill>
+        <p:spPr>
+          <a:xfrm>
+            <a:off x="0" y="0"/>
+            <a:ext cx="9144000" cy="6858000"/>
+          </a:xfrm>
+          <a:prstGeom prst="rect">
+            <a:avLst/>
+          </a:prstGeom>
+        </p:spPr>
+      </p:pic>
+      <p:sp>
+        <p:nvSpPr>
+          <p:cNvPr id="3" name="TextBox 2"/>
+          <p:cNvSpPr txBox="1"/>
+          <p:nvPr/>
+        </p:nvSpPr>
+        <p:spPr>
+          <a:xfrm>
+            <a:off x="2428700" y="1196752"/>
+            <a:ext cx="3570208" cy="707886"/>
+          </a:xfrm>
+          <a:prstGeom prst="rect">
+            <a:avLst/>
+          </a:prstGeom>
+          <a:noFill/>
+        </p:spPr>
+        <p:txBody>
+          <a:bodyPr wrap="none" rtlCol="0">
+            <a:spAutoFit/>
+          </a:bodyPr>
+          <a:lstStyle/>
+          <a:p>
+            <a:r>
+              <a:rPr lang="ru-RU" sz="4000" b="1" dirty="0" smtClean="0">
+                <a:latin typeface="Consolas" panose="020B0609020204030204" pitchFamily="49" charset="0"/>
+              </a:rPr>
+              <a:t>Что в итоге?</a:t>
+            </a:r>
+            <a:endParaRPr lang="en-US" sz="4000" b="1" dirty="0" smtClean="0">
+              <a:latin typeface="Consolas" panose="020B0609020204030204" pitchFamily="49" charset="0"/>
+            </a:endParaRPr>
+          </a:p>
+        </p:txBody>
+      </p:sp>
+      <p:sp>
+        <p:nvSpPr>
+          <p:cNvPr id="6" name="TextBox 5"/>
+          <p:cNvSpPr txBox="1"/>
+          <p:nvPr/>
+        </p:nvSpPr>
+        <p:spPr>
+          <a:xfrm>
+            <a:off x="2428699" y="2309971"/>
+            <a:ext cx="6469949" cy="830997"/>
+          </a:xfrm>
+          <a:prstGeom prst="rect">
+            <a:avLst/>
+          </a:prstGeom>
+          <a:noFill/>
+        </p:spPr>
+        <p:txBody>
+          <a:bodyPr wrap="square" rtlCol="0">
+            <a:spAutoFit/>
+          </a:bodyPr>
+          <a:lstStyle/>
+          <a:p>
+            <a:r>
+              <a:rPr lang="ru-RU" sz="2400" b="1" dirty="0">
+                <a:solidFill>
+                  <a:srgbClr val="00B050"/>
+                </a:solidFill>
+                <a:latin typeface="Consolas" panose="020B0609020204030204" pitchFamily="49" charset="0"/>
+              </a:rPr>
+              <a:t>+</a:t>
+            </a:r>
+            <a:r>
+              <a:rPr lang="en-US" sz="2400" b="1" dirty="0" smtClean="0">
+                <a:latin typeface="Consolas" panose="020B0609020204030204" pitchFamily="49" charset="0"/>
+              </a:rPr>
+              <a:t> </a:t>
+            </a:r>
+            <a:r>
+              <a:rPr lang="ru-RU" sz="2400" b="1" dirty="0" smtClean="0">
+                <a:latin typeface="Consolas" panose="020B0609020204030204" pitchFamily="49" charset="0"/>
+              </a:rPr>
+              <a:t>Высочайшая скорость вычислений новых поколений.</a:t>
+            </a:r>
+          </a:p>
+        </p:txBody>
+      </p:sp>
+      <p:sp>
+        <p:nvSpPr>
+          <p:cNvPr id="9" name="TextBox 8"/>
+          <p:cNvSpPr txBox="1"/>
+          <p:nvPr/>
+        </p:nvSpPr>
+        <p:spPr>
+          <a:xfrm>
+            <a:off x="2441778" y="3452807"/>
+            <a:ext cx="6469949" cy="1200329"/>
+          </a:xfrm>
+          <a:prstGeom prst="rect">
+            <a:avLst/>
+          </a:prstGeom>
+          <a:noFill/>
+        </p:spPr>
+        <p:txBody>
+          <a:bodyPr wrap="square" rtlCol="0">
+            <a:spAutoFit/>
+          </a:bodyPr>
+          <a:lstStyle/>
+          <a:p>
+            <a:r>
+              <a:rPr lang="ru-RU" sz="2400" b="1" dirty="0">
+                <a:solidFill>
+                  <a:srgbClr val="00B050"/>
+                </a:solidFill>
+                <a:latin typeface="Consolas" panose="020B0609020204030204" pitchFamily="49" charset="0"/>
+              </a:rPr>
+              <a:t>+</a:t>
+            </a:r>
+            <a:r>
+              <a:rPr lang="en-US" sz="2400" b="1" dirty="0" smtClean="0">
+                <a:latin typeface="Consolas" panose="020B0609020204030204" pitchFamily="49" charset="0"/>
+              </a:rPr>
+              <a:t> </a:t>
+            </a:r>
+            <a:r>
+              <a:rPr lang="ru-RU" sz="2400" dirty="0" smtClean="0">
+                <a:latin typeface="Consolas" panose="020B0609020204030204" pitchFamily="49" charset="0"/>
+              </a:rPr>
+              <a:t>Реализация детальной настройки состояния клеток, тороидальной поверхности и счётчика поколений.</a:t>
+            </a:r>
+          </a:p>
+        </p:txBody>
+      </p:sp>
+      <p:sp>
+        <p:nvSpPr>
+          <p:cNvPr id="10" name="TextBox 9"/>
+          <p:cNvSpPr txBox="1"/>
+          <p:nvPr/>
+        </p:nvSpPr>
+        <p:spPr>
+          <a:xfrm>
+            <a:off x="2454857" y="4974267"/>
+            <a:ext cx="6469949" cy="830997"/>
+          </a:xfrm>
+          <a:prstGeom prst="rect">
+            <a:avLst/>
+          </a:prstGeom>
+          <a:noFill/>
+        </p:spPr>
+        <p:txBody>
+          <a:bodyPr wrap="square" rtlCol="0">
+            <a:spAutoFit/>
+          </a:bodyPr>
+          <a:lstStyle/>
+          <a:p>
+            <a:r>
+              <a:rPr lang="ru-RU" sz="2400" b="1" dirty="0">
+                <a:solidFill>
+                  <a:srgbClr val="00B050"/>
+                </a:solidFill>
+                <a:latin typeface="Consolas" panose="020B0609020204030204" pitchFamily="49" charset="0"/>
+              </a:rPr>
+              <a:t>+</a:t>
+            </a:r>
+            <a:r>
+              <a:rPr lang="en-US" sz="2400" b="1" dirty="0" smtClean="0">
+                <a:latin typeface="Consolas" panose="020B0609020204030204" pitchFamily="49" charset="0"/>
+              </a:rPr>
+              <a:t> </a:t>
+            </a:r>
+            <a:r>
+              <a:rPr lang="ru-RU" sz="2400" dirty="0" smtClean="0">
+                <a:latin typeface="Consolas" panose="020B0609020204030204" pitchFamily="49" charset="0"/>
+              </a:rPr>
+              <a:t>Корректное синхронизированное выполнение всех процессов.</a:t>
+            </a:r>
+          </a:p>
+        </p:txBody>
+      </p:sp>
+    </p:spTree>
+    <p:extLst>
+      <p:ext uri="{BB962C8B-B14F-4D97-AF65-F5344CB8AC3E}">
+        <p14:creationId xmlns:p14="http://schemas.microsoft.com/office/powerpoint/2010/main" val="114225498"/>
       </p:ext>
     </p:extLst>
   </p:cSld>
